--- a/B13_Slides.pptx
+++ b/B13_Slides.pptx
@@ -2,22 +2,22 @@
 <file path=ppt/presentation.xml><?xml version="1.0" encoding="utf-8"?>
 <p:presentation xmlns:p="http://schemas.openxmlformats.org/presentationml/2006/main">
   <p:sldMasterIdLst>
-    <p:sldMasterId xmlns:r="http://schemas.openxmlformats.org/officeDocument/2006/relationships" id="2147483648" r:id="R71d2cc0e3fb5402d"/>
+    <p:sldMasterId xmlns:r="http://schemas.openxmlformats.org/officeDocument/2006/relationships" id="2147483648" r:id="R4585d4c391cc4bea"/>
   </p:sldMasterIdLst>
   <p:notesMasterIdLst>
-    <p:notesMasterId xmlns:r="http://schemas.openxmlformats.org/officeDocument/2006/relationships" r:id="R23c3937a41414503"/>
+    <p:notesMasterId xmlns:r="http://schemas.openxmlformats.org/officeDocument/2006/relationships" r:id="R60db600c67e44b91"/>
   </p:notesMasterIdLst>
   <p:sldIdLst>
-    <p:sldId xmlns:r="http://schemas.openxmlformats.org/officeDocument/2006/relationships" id="256" r:id="Re00d38b3e1ab4573"/>
-    <p:sldId xmlns:r="http://schemas.openxmlformats.org/officeDocument/2006/relationships" id="257" r:id="R85b3fa1aa4374b01"/>
-    <p:sldId xmlns:r="http://schemas.openxmlformats.org/officeDocument/2006/relationships" id="258" r:id="R2f101b8e217e4547"/>
-    <p:sldId xmlns:r="http://schemas.openxmlformats.org/officeDocument/2006/relationships" id="259" r:id="Rbf79e2274b5d448c"/>
-    <p:sldId xmlns:r="http://schemas.openxmlformats.org/officeDocument/2006/relationships" id="260" r:id="R87386704a6b9488f"/>
-    <p:sldId xmlns:r="http://schemas.openxmlformats.org/officeDocument/2006/relationships" id="261" r:id="R781bc3ea9ef447dc"/>
-    <p:sldId xmlns:r="http://schemas.openxmlformats.org/officeDocument/2006/relationships" id="262" r:id="Rdc4dde95fe0a493a"/>
-    <p:sldId xmlns:r="http://schemas.openxmlformats.org/officeDocument/2006/relationships" id="263" r:id="R8337e29ea03a4af1"/>
-    <p:sldId xmlns:r="http://schemas.openxmlformats.org/officeDocument/2006/relationships" id="264" r:id="Rcabbf2cce3884e5b"/>
-    <p:sldId xmlns:r="http://schemas.openxmlformats.org/officeDocument/2006/relationships" id="265" r:id="R7eb949ac0b824d8a"/>
+    <p:sldId xmlns:r="http://schemas.openxmlformats.org/officeDocument/2006/relationships" id="256" r:id="R5e5ac11c0bc640ab"/>
+    <p:sldId xmlns:r="http://schemas.openxmlformats.org/officeDocument/2006/relationships" id="257" r:id="R1b7fb1684cd64457"/>
+    <p:sldId xmlns:r="http://schemas.openxmlformats.org/officeDocument/2006/relationships" id="258" r:id="R0970d9356e4448ef"/>
+    <p:sldId xmlns:r="http://schemas.openxmlformats.org/officeDocument/2006/relationships" id="259" r:id="R51fdf960367d48e4"/>
+    <p:sldId xmlns:r="http://schemas.openxmlformats.org/officeDocument/2006/relationships" id="260" r:id="R47fec4e6810f4185"/>
+    <p:sldId xmlns:r="http://schemas.openxmlformats.org/officeDocument/2006/relationships" id="261" r:id="R9bd5d2f782d64588"/>
+    <p:sldId xmlns:r="http://schemas.openxmlformats.org/officeDocument/2006/relationships" id="262" r:id="Rc1983dd6a1a6418d"/>
+    <p:sldId xmlns:r="http://schemas.openxmlformats.org/officeDocument/2006/relationships" id="263" r:id="R715d6215f7ec4842"/>
+    <p:sldId xmlns:r="http://schemas.openxmlformats.org/officeDocument/2006/relationships" id="264" r:id="Rfe087f64e7544f3c"/>
+    <p:sldId xmlns:r="http://schemas.openxmlformats.org/officeDocument/2006/relationships" id="265" r:id="Re1d5c7bfdc3345e1"/>
   </p:sldIdLst>
   <p:sldSz cx="12192000" cy="6858000"/>
   <p:notesSz cx="6858000" cy="9144000"/>
@@ -1149,7 +1149,7 @@
   </p:cSld>
   <p:clrMap bg1="lt1" tx1="dk1" bg2="lt2" tx2="dk2" accent1="accent1" accent2="accent2" accent3="accent3" accent4="accent4" accent5="accent5" accent6="accent6" hlink="hlink" folHlink="folHlink"/>
   <p:sldLayoutIdLst>
-    <p:sldLayoutId xmlns:r="http://schemas.openxmlformats.org/officeDocument/2006/relationships" id="2147483649" r:id="R315203f30ef344bd"/>
+    <p:sldLayoutId xmlns:r="http://schemas.openxmlformats.org/officeDocument/2006/relationships" id="2147483649" r:id="R4693cb501d7946bd"/>
   </p:sldLayoutIdLst>
   <p:txStyles>
     <p:titleStyle>
@@ -1700,7 +1700,7 @@
           <p:cNvPr id="8" name="">
             <a:extLst xmlns:a="http://schemas.openxmlformats.org/drawingml/2006/main">
               <a:ext uri="{FF2B5EF4-FFF2-40B4-BE49-F238E27FC236}">
-                <a16:creationId xmlns:a16="http://schemas.microsoft.com/office/drawing/2014/main" id="{90271F7D-F4AD-44CB-AE36-C3DEA294B730}"/>
+                <a16:creationId xmlns:a16="http://schemas.microsoft.com/office/drawing/2014/main" id="{44B777A6-17F3-4316-B711-F2ADDDCFFC87}"/>
               </a:ext>
             </a:extLst>
           </p:cNvPr>
@@ -1730,7 +1730,7 @@
           <p:cNvPr id="2" name="">
             <a:extLst xmlns:a="http://schemas.openxmlformats.org/drawingml/2006/main">
               <a:ext uri="{FF2B5EF4-FFF2-40B4-BE49-F238E27FC236}">
-                <a16:creationId xmlns:a16="http://schemas.microsoft.com/office/drawing/2014/main" id="{04588E1F-0873-4F76-A382-A15B12C70E77}"/>
+                <a16:creationId xmlns:a16="http://schemas.microsoft.com/office/drawing/2014/main" id="{70FCD4B9-D2B0-451B-A340-5CB16CF0B578}"/>
               </a:ext>
             </a:extLst>
           </p:cNvPr>
@@ -1810,7 +1810,7 @@
           <p:cNvPr id="3" name="">
             <a:extLst xmlns:a="http://schemas.openxmlformats.org/drawingml/2006/main">
               <a:ext uri="{FF2B5EF4-FFF2-40B4-BE49-F238E27FC236}">
-                <a16:creationId xmlns:a16="http://schemas.microsoft.com/office/drawing/2014/main" id="{A3C3CC33-016F-48DC-B748-82BA6B38637C}"/>
+                <a16:creationId xmlns:a16="http://schemas.microsoft.com/office/drawing/2014/main" id="{A3A469EB-7D95-46BC-B8DE-A77C3DB56758}"/>
               </a:ext>
             </a:extLst>
           </p:cNvPr>
@@ -1867,7 +1867,7 @@
           <p:cNvPr id="4" name="">
             <a:extLst xmlns:a="http://schemas.openxmlformats.org/drawingml/2006/main">
               <a:ext uri="{FF2B5EF4-FFF2-40B4-BE49-F238E27FC236}">
-                <a16:creationId xmlns:a16="http://schemas.microsoft.com/office/drawing/2014/main" id="{C2A76DB8-6C8E-41C3-993B-870D79DA5CE4}"/>
+                <a16:creationId xmlns:a16="http://schemas.microsoft.com/office/drawing/2014/main" id="{4F97FFA2-E1F2-4622-B856-21ED54525F83}"/>
               </a:ext>
             </a:extLst>
           </p:cNvPr>
@@ -1924,7 +1924,7 @@
           <p:cNvPr id="5" name="">
             <a:extLst xmlns:a="http://schemas.openxmlformats.org/drawingml/2006/main">
               <a:ext uri="{FF2B5EF4-FFF2-40B4-BE49-F238E27FC236}">
-                <a16:creationId xmlns:a16="http://schemas.microsoft.com/office/drawing/2014/main" id="{8F472014-A00C-4D7E-85D4-0D687E7CB04E}"/>
+                <a16:creationId xmlns:a16="http://schemas.microsoft.com/office/drawing/2014/main" id="{2021909E-A464-4968-8E88-159E599965EE}"/>
               </a:ext>
             </a:extLst>
           </p:cNvPr>
@@ -2004,7 +2004,7 @@
           <p:cNvPr id="6" name="">
             <a:extLst xmlns:a="http://schemas.openxmlformats.org/drawingml/2006/main">
               <a:ext uri="{FF2B5EF4-FFF2-40B4-BE49-F238E27FC236}">
-                <a16:creationId xmlns:a16="http://schemas.microsoft.com/office/drawing/2014/main" id="{0EC8EF91-4B05-468A-A572-AF61729227DC}"/>
+                <a16:creationId xmlns:a16="http://schemas.microsoft.com/office/drawing/2014/main" id="{B459C7F3-2DA9-4E34-B12D-29DBAAB2F344}"/>
               </a:ext>
             </a:extLst>
           </p:cNvPr>
@@ -2061,7 +2061,7 @@
           <p:cNvPr id="7" name="">
             <a:extLst xmlns:a="http://schemas.openxmlformats.org/drawingml/2006/main">
               <a:ext uri="{FF2B5EF4-FFF2-40B4-BE49-F238E27FC236}">
-                <a16:creationId xmlns:a16="http://schemas.microsoft.com/office/drawing/2014/main" id="{FD2E4D9B-D687-41B1-A381-F291C1A9E987}"/>
+                <a16:creationId xmlns:a16="http://schemas.microsoft.com/office/drawing/2014/main" id="{DB18CBC3-11BB-4711-84BD-252256267CDE}"/>
               </a:ext>
             </a:extLst>
           </p:cNvPr>
@@ -2116,7 +2116,7 @@
     </p:spTree>
     <p:extLst>
       <p:ext uri="{BB962C8B-B14F-4D97-AF65-F5344CB8AC3E}">
-        <p14:creationId xmlns:p14="http://schemas.microsoft.com/office/powerpoint/2010/main" val="266405601"/>
+        <p14:creationId xmlns:p14="http://schemas.microsoft.com/office/powerpoint/2010/main" val="164731310"/>
       </p:ext>
     </p:extLst>
   </p:cSld>
@@ -2147,7 +2147,7 @@
           <p:cNvPr id="17" name="">
             <a:extLst xmlns:a="http://schemas.openxmlformats.org/drawingml/2006/main">
               <a:ext uri="{FF2B5EF4-FFF2-40B4-BE49-F238E27FC236}">
-                <a16:creationId xmlns:a16="http://schemas.microsoft.com/office/drawing/2014/main" id="{C8CD4B76-43A5-43F5-8E70-B7996A6103B1}"/>
+                <a16:creationId xmlns:a16="http://schemas.microsoft.com/office/drawing/2014/main" id="{891691F8-FC4E-458F-B4A4-1ACA8562E395}"/>
               </a:ext>
             </a:extLst>
           </p:cNvPr>
@@ -2204,7 +2204,7 @@
           <p:cNvPr id="2" name="">
             <a:extLst xmlns:a="http://schemas.openxmlformats.org/drawingml/2006/main">
               <a:ext uri="{FF2B5EF4-FFF2-40B4-BE49-F238E27FC236}">
-                <a16:creationId xmlns:a16="http://schemas.microsoft.com/office/drawing/2014/main" id="{61CB96D4-ADC0-44ED-9EC5-E793D955967C}"/>
+                <a16:creationId xmlns:a16="http://schemas.microsoft.com/office/drawing/2014/main" id="{CBBBC76F-DBC4-4369-A988-B10BF0781E3F}"/>
               </a:ext>
             </a:extLst>
           </p:cNvPr>
@@ -2261,7 +2261,7 @@
           <p:cNvPr id="3" name="">
             <a:extLst xmlns:a="http://schemas.openxmlformats.org/drawingml/2006/main">
               <a:ext uri="{FF2B5EF4-FFF2-40B4-BE49-F238E27FC236}">
-                <a16:creationId xmlns:a16="http://schemas.microsoft.com/office/drawing/2014/main" id="{2447F625-FADB-4F12-8FE5-6AE177A700C3}"/>
+                <a16:creationId xmlns:a16="http://schemas.microsoft.com/office/drawing/2014/main" id="{EFD4C97E-DFEC-40A1-ABA2-838A693C8A93}"/>
               </a:ext>
             </a:extLst>
           </p:cNvPr>
@@ -2318,7 +2318,7 @@
           <p:cNvPr id="4" name="">
             <a:extLst xmlns:a="http://schemas.openxmlformats.org/drawingml/2006/main">
               <a:ext uri="{FF2B5EF4-FFF2-40B4-BE49-F238E27FC236}">
-                <a16:creationId xmlns:a16="http://schemas.microsoft.com/office/drawing/2014/main" id="{7469FBFB-B38D-46EA-94BB-401EB88E76F9}"/>
+                <a16:creationId xmlns:a16="http://schemas.microsoft.com/office/drawing/2014/main" id="{ACA2624D-EF27-4552-A162-E2CF1C61DAA4}"/>
               </a:ext>
             </a:extLst>
           </p:cNvPr>
@@ -2375,7 +2375,7 @@
           <p:cNvPr id="5" name="">
             <a:extLst xmlns:a="http://schemas.openxmlformats.org/drawingml/2006/main">
               <a:ext uri="{FF2B5EF4-FFF2-40B4-BE49-F238E27FC236}">
-                <a16:creationId xmlns:a16="http://schemas.microsoft.com/office/drawing/2014/main" id="{CE0C93AB-85C4-491E-A780-382E9AA57B8E}"/>
+                <a16:creationId xmlns:a16="http://schemas.microsoft.com/office/drawing/2014/main" id="{39A0EF28-2154-40E8-BF60-450DF632105F}"/>
               </a:ext>
             </a:extLst>
           </p:cNvPr>
@@ -2432,7 +2432,7 @@
           <p:cNvPr id="6" name="">
             <a:extLst xmlns:a="http://schemas.openxmlformats.org/drawingml/2006/main">
               <a:ext uri="{FF2B5EF4-FFF2-40B4-BE49-F238E27FC236}">
-                <a16:creationId xmlns:a16="http://schemas.microsoft.com/office/drawing/2014/main" id="{A819C06F-ACFD-4A0B-A514-6D4B99A3D32B}"/>
+                <a16:creationId xmlns:a16="http://schemas.microsoft.com/office/drawing/2014/main" id="{DCBC8DBF-AB2E-4DFA-9F07-7C92DACBBFA7}"/>
               </a:ext>
             </a:extLst>
           </p:cNvPr>
@@ -2489,7 +2489,7 @@
           <p:cNvPr id="7" name="">
             <a:extLst xmlns:a="http://schemas.openxmlformats.org/drawingml/2006/main">
               <a:ext uri="{FF2B5EF4-FFF2-40B4-BE49-F238E27FC236}">
-                <a16:creationId xmlns:a16="http://schemas.microsoft.com/office/drawing/2014/main" id="{A6F7B16C-4F43-4F3E-99A4-577842A52474}"/>
+                <a16:creationId xmlns:a16="http://schemas.microsoft.com/office/drawing/2014/main" id="{7819EE9C-7CD5-4A51-9FFD-3BA253BFE787}"/>
               </a:ext>
             </a:extLst>
           </p:cNvPr>
@@ -2546,7 +2546,7 @@
           <p:cNvPr id="8" name="">
             <a:extLst xmlns:a="http://schemas.openxmlformats.org/drawingml/2006/main">
               <a:ext uri="{FF2B5EF4-FFF2-40B4-BE49-F238E27FC236}">
-                <a16:creationId xmlns:a16="http://schemas.microsoft.com/office/drawing/2014/main" id="{48820D70-A6DF-4DAE-A72A-446764B7459E}"/>
+                <a16:creationId xmlns:a16="http://schemas.microsoft.com/office/drawing/2014/main" id="{49167A6B-75A3-476D-8A91-D98C34C11375}"/>
               </a:ext>
             </a:extLst>
           </p:cNvPr>
@@ -2603,7 +2603,7 @@
           <p:cNvPr id="9" name="">
             <a:extLst xmlns:a="http://schemas.openxmlformats.org/drawingml/2006/main">
               <a:ext uri="{FF2B5EF4-FFF2-40B4-BE49-F238E27FC236}">
-                <a16:creationId xmlns:a16="http://schemas.microsoft.com/office/drawing/2014/main" id="{060197BD-6F6C-4070-B6E5-EB44697C0383}"/>
+                <a16:creationId xmlns:a16="http://schemas.microsoft.com/office/drawing/2014/main" id="{5B4F4C23-074F-43E4-BBDE-EDA927E58B82}"/>
               </a:ext>
             </a:extLst>
           </p:cNvPr>
@@ -2660,7 +2660,7 @@
           <p:cNvPr id="10" name="">
             <a:extLst xmlns:a="http://schemas.openxmlformats.org/drawingml/2006/main">
               <a:ext uri="{FF2B5EF4-FFF2-40B4-BE49-F238E27FC236}">
-                <a16:creationId xmlns:a16="http://schemas.microsoft.com/office/drawing/2014/main" id="{DCAF847D-CB11-41AE-AF25-8D53DD0352F9}"/>
+                <a16:creationId xmlns:a16="http://schemas.microsoft.com/office/drawing/2014/main" id="{80CC2E89-0219-4679-B263-5BAD1463E942}"/>
               </a:ext>
             </a:extLst>
           </p:cNvPr>
@@ -2717,7 +2717,7 @@
           <p:cNvPr id="11" name="">
             <a:extLst xmlns:a="http://schemas.openxmlformats.org/drawingml/2006/main">
               <a:ext uri="{FF2B5EF4-FFF2-40B4-BE49-F238E27FC236}">
-                <a16:creationId xmlns:a16="http://schemas.microsoft.com/office/drawing/2014/main" id="{6B7838CD-F6B2-43EF-ADC4-ED098E742420}"/>
+                <a16:creationId xmlns:a16="http://schemas.microsoft.com/office/drawing/2014/main" id="{15EB8F82-4219-4428-B534-8111278449FF}"/>
               </a:ext>
             </a:extLst>
           </p:cNvPr>
@@ -2774,7 +2774,7 @@
           <p:cNvPr id="12" name="">
             <a:extLst xmlns:a="http://schemas.openxmlformats.org/drawingml/2006/main">
               <a:ext uri="{FF2B5EF4-FFF2-40B4-BE49-F238E27FC236}">
-                <a16:creationId xmlns:a16="http://schemas.microsoft.com/office/drawing/2014/main" id="{4052A421-6227-4898-858B-EE201B1BCFA4}"/>
+                <a16:creationId xmlns:a16="http://schemas.microsoft.com/office/drawing/2014/main" id="{8AC0B253-8BB2-439D-8FFD-C1BFCD632757}"/>
               </a:ext>
             </a:extLst>
           </p:cNvPr>
@@ -2887,7 +2887,7 @@
           <p:cNvPr id="13" name="">
             <a:extLst xmlns:a="http://schemas.openxmlformats.org/drawingml/2006/main">
               <a:ext uri="{FF2B5EF4-FFF2-40B4-BE49-F238E27FC236}">
-                <a16:creationId xmlns:a16="http://schemas.microsoft.com/office/drawing/2014/main" id="{1175D607-B738-465E-808A-68A792C6EB74}"/>
+                <a16:creationId xmlns:a16="http://schemas.microsoft.com/office/drawing/2014/main" id="{DD5B4C1F-54F2-43DF-90D0-7634EBA9DB2F}"/>
               </a:ext>
             </a:extLst>
           </p:cNvPr>
@@ -2917,7 +2917,7 @@
           <p:cNvPr id="14" name="">
             <a:extLst xmlns:a="http://schemas.openxmlformats.org/drawingml/2006/main">
               <a:ext uri="{FF2B5EF4-FFF2-40B4-BE49-F238E27FC236}">
-                <a16:creationId xmlns:a16="http://schemas.microsoft.com/office/drawing/2014/main" id="{2704FB42-7FD0-4DC4-AAA9-EBDDDA2E6342}"/>
+                <a16:creationId xmlns:a16="http://schemas.microsoft.com/office/drawing/2014/main" id="{01AB3ECD-F146-4421-8821-40EAD7FEFF4F}"/>
               </a:ext>
             </a:extLst>
           </p:cNvPr>
@@ -2974,7 +2974,7 @@
           <p:cNvPr id="15" name="">
             <a:extLst xmlns:a="http://schemas.openxmlformats.org/drawingml/2006/main">
               <a:ext uri="{FF2B5EF4-FFF2-40B4-BE49-F238E27FC236}">
-                <a16:creationId xmlns:a16="http://schemas.microsoft.com/office/drawing/2014/main" id="{7AC5F389-2A5D-49CA-850A-7F3C60EB9CFD}"/>
+                <a16:creationId xmlns:a16="http://schemas.microsoft.com/office/drawing/2014/main" id="{48F6B235-6640-4FC0-A4F9-EF3A9D9931B8}"/>
               </a:ext>
             </a:extLst>
           </p:cNvPr>
@@ -2998,7 +2998,7 @@
         </p:spPr>
         <p:txBody>
           <a:bodyPr xmlns:a="http://schemas.openxmlformats.org/drawingml/2006/main" anchor="ctr">
-            <a:normAutofit fontScale="80000"/>
+            <a:normAutofit fontScale="96622"/>
           </a:bodyPr>
           <a:lstStyle xmlns:a="http://schemas.openxmlformats.org/drawingml/2006/main"/>
           <a:p xmlns:a="http://schemas.openxmlformats.org/drawingml/2006/main">
@@ -3021,7 +3021,7 @@
                 <a:ea typeface="Arial"/>
                 <a:cs typeface="Arial"/>
               </a:rPr>
-              <a:t>Next: add the team's source trees and optional evidence screenshots</a:t>
+              <a:t>Final source trees and supporting evidence are included</a:t>
             </a:r>
           </a:p>
         </p:txBody>
@@ -3031,7 +3031,7 @@
           <p:cNvPr id="16" name="">
             <a:extLst xmlns:a="http://schemas.openxmlformats.org/drawingml/2006/main">
               <a:ext uri="{FF2B5EF4-FFF2-40B4-BE49-F238E27FC236}">
-                <a16:creationId xmlns:a16="http://schemas.microsoft.com/office/drawing/2014/main" id="{2E767619-E080-4F94-899F-BCE4D941D7FD}"/>
+                <a16:creationId xmlns:a16="http://schemas.microsoft.com/office/drawing/2014/main" id="{DE28A68C-E650-4A16-8403-CBA979062167}"/>
               </a:ext>
             </a:extLst>
           </p:cNvPr>
@@ -3086,7 +3086,7 @@
     </p:spTree>
     <p:extLst>
       <p:ext uri="{BB962C8B-B14F-4D97-AF65-F5344CB8AC3E}">
-        <p14:creationId xmlns:p14="http://schemas.microsoft.com/office/powerpoint/2010/main" val="1785719737"/>
+        <p14:creationId xmlns:p14="http://schemas.microsoft.com/office/powerpoint/2010/main" val="1337161118"/>
       </p:ext>
     </p:extLst>
   </p:cSld>
@@ -3117,7 +3117,7 @@
           <p:cNvPr id="21" name="">
             <a:extLst xmlns:a="http://schemas.openxmlformats.org/drawingml/2006/main">
               <a:ext uri="{FF2B5EF4-FFF2-40B4-BE49-F238E27FC236}">
-                <a16:creationId xmlns:a16="http://schemas.microsoft.com/office/drawing/2014/main" id="{01CE4DED-304D-486F-9E4E-19E028594948}"/>
+                <a16:creationId xmlns:a16="http://schemas.microsoft.com/office/drawing/2014/main" id="{C9F216BC-3C59-48B0-82C9-F9AE9609D698}"/>
               </a:ext>
             </a:extLst>
           </p:cNvPr>
@@ -3174,7 +3174,7 @@
           <p:cNvPr id="2" name="">
             <a:extLst xmlns:a="http://schemas.openxmlformats.org/drawingml/2006/main">
               <a:ext uri="{FF2B5EF4-FFF2-40B4-BE49-F238E27FC236}">
-                <a16:creationId xmlns:a16="http://schemas.microsoft.com/office/drawing/2014/main" id="{D2C51930-3E37-4BAD-B763-E67C818AAD79}"/>
+                <a16:creationId xmlns:a16="http://schemas.microsoft.com/office/drawing/2014/main" id="{451ED1FC-A541-4ACE-AD03-FCB2F58C0526}"/>
               </a:ext>
             </a:extLst>
           </p:cNvPr>
@@ -3231,7 +3231,7 @@
           <p:cNvPr id="3" name="">
             <a:extLst xmlns:a="http://schemas.openxmlformats.org/drawingml/2006/main">
               <a:ext uri="{FF2B5EF4-FFF2-40B4-BE49-F238E27FC236}">
-                <a16:creationId xmlns:a16="http://schemas.microsoft.com/office/drawing/2014/main" id="{34E19533-EC57-4A44-991A-17ABB5E163B8}"/>
+                <a16:creationId xmlns:a16="http://schemas.microsoft.com/office/drawing/2014/main" id="{C5D6629B-A415-41AE-8083-2EA3B62B8D67}"/>
               </a:ext>
             </a:extLst>
           </p:cNvPr>
@@ -3261,7 +3261,7 @@
           <p:cNvPr id="4" name="">
             <a:extLst xmlns:a="http://schemas.openxmlformats.org/drawingml/2006/main">
               <a:ext uri="{FF2B5EF4-FFF2-40B4-BE49-F238E27FC236}">
-                <a16:creationId xmlns:a16="http://schemas.microsoft.com/office/drawing/2014/main" id="{DC2BF5AC-0BCD-44E9-820F-AB82C7763192}"/>
+                <a16:creationId xmlns:a16="http://schemas.microsoft.com/office/drawing/2014/main" id="{E8278E13-D8DE-4C30-8F82-6167241BDB18}"/>
               </a:ext>
             </a:extLst>
           </p:cNvPr>
@@ -3296,7 +3296,7 @@
           <p:cNvPr id="5" name="">
             <a:extLst xmlns:a="http://schemas.openxmlformats.org/drawingml/2006/main">
               <a:ext uri="{FF2B5EF4-FFF2-40B4-BE49-F238E27FC236}">
-                <a16:creationId xmlns:a16="http://schemas.microsoft.com/office/drawing/2014/main" id="{F39E99ED-ACB6-464C-BE82-49B85E9A5505}"/>
+                <a16:creationId xmlns:a16="http://schemas.microsoft.com/office/drawing/2014/main" id="{4460E34B-3A25-4243-AE6C-1994172F12B9}"/>
               </a:ext>
             </a:extLst>
           </p:cNvPr>
@@ -3376,7 +3376,7 @@
           <p:cNvPr id="6" name="">
             <a:extLst xmlns:a="http://schemas.openxmlformats.org/drawingml/2006/main">
               <a:ext uri="{FF2B5EF4-FFF2-40B4-BE49-F238E27FC236}">
-                <a16:creationId xmlns:a16="http://schemas.microsoft.com/office/drawing/2014/main" id="{3B82C2BA-B6D0-420D-B091-99C83FFE686C}"/>
+                <a16:creationId xmlns:a16="http://schemas.microsoft.com/office/drawing/2014/main" id="{8ECDFA2B-0825-4D5C-B6BB-E6810F454536}"/>
               </a:ext>
             </a:extLst>
           </p:cNvPr>
@@ -3411,7 +3411,7 @@
           <p:cNvPr id="7" name="">
             <a:extLst xmlns:a="http://schemas.openxmlformats.org/drawingml/2006/main">
               <a:ext uri="{FF2B5EF4-FFF2-40B4-BE49-F238E27FC236}">
-                <a16:creationId xmlns:a16="http://schemas.microsoft.com/office/drawing/2014/main" id="{BCC0CFEB-88E8-44E1-B309-63646946537E}"/>
+                <a16:creationId xmlns:a16="http://schemas.microsoft.com/office/drawing/2014/main" id="{0DEB9902-2609-4F6E-B03E-1D1C9D6E055E}"/>
               </a:ext>
             </a:extLst>
           </p:cNvPr>
@@ -3491,7 +3491,7 @@
           <p:cNvPr id="8" name="">
             <a:extLst xmlns:a="http://schemas.openxmlformats.org/drawingml/2006/main">
               <a:ext uri="{FF2B5EF4-FFF2-40B4-BE49-F238E27FC236}">
-                <a16:creationId xmlns:a16="http://schemas.microsoft.com/office/drawing/2014/main" id="{C29FA4E5-BA32-47E8-924D-33973D95CD56}"/>
+                <a16:creationId xmlns:a16="http://schemas.microsoft.com/office/drawing/2014/main" id="{E2D1D08C-F8DB-4270-B9E1-228271181FC5}"/>
               </a:ext>
             </a:extLst>
           </p:cNvPr>
@@ -3526,7 +3526,7 @@
           <p:cNvPr id="9" name="">
             <a:extLst xmlns:a="http://schemas.openxmlformats.org/drawingml/2006/main">
               <a:ext uri="{FF2B5EF4-FFF2-40B4-BE49-F238E27FC236}">
-                <a16:creationId xmlns:a16="http://schemas.microsoft.com/office/drawing/2014/main" id="{64105D82-AC5D-464B-A725-FC4238692E74}"/>
+                <a16:creationId xmlns:a16="http://schemas.microsoft.com/office/drawing/2014/main" id="{7016740A-6F8B-48D9-B402-657BD4D767C8}"/>
               </a:ext>
             </a:extLst>
           </p:cNvPr>
@@ -3606,7 +3606,7 @@
           <p:cNvPr id="10" name="">
             <a:extLst xmlns:a="http://schemas.openxmlformats.org/drawingml/2006/main">
               <a:ext uri="{FF2B5EF4-FFF2-40B4-BE49-F238E27FC236}">
-                <a16:creationId xmlns:a16="http://schemas.microsoft.com/office/drawing/2014/main" id="{72E4326E-1FE0-4925-B51B-B748D51A7B68}"/>
+                <a16:creationId xmlns:a16="http://schemas.microsoft.com/office/drawing/2014/main" id="{7288373D-E161-4DE0-8E32-603D5BFE6D96}"/>
               </a:ext>
             </a:extLst>
           </p:cNvPr>
@@ -3641,7 +3641,7 @@
           <p:cNvPr id="11" name="">
             <a:extLst xmlns:a="http://schemas.openxmlformats.org/drawingml/2006/main">
               <a:ext uri="{FF2B5EF4-FFF2-40B4-BE49-F238E27FC236}">
-                <a16:creationId xmlns:a16="http://schemas.microsoft.com/office/drawing/2014/main" id="{A1CB3528-0708-4115-9045-63881FB69531}"/>
+                <a16:creationId xmlns:a16="http://schemas.microsoft.com/office/drawing/2014/main" id="{55BC4ED4-B62C-4A98-8071-B38FBC2262BA}"/>
               </a:ext>
             </a:extLst>
           </p:cNvPr>
@@ -3799,7 +3799,7 @@
           <p:cNvPr id="15" name="">
             <a:extLst xmlns:a="http://schemas.openxmlformats.org/drawingml/2006/main">
               <a:ext uri="{FF2B5EF4-FFF2-40B4-BE49-F238E27FC236}">
-                <a16:creationId xmlns:a16="http://schemas.microsoft.com/office/drawing/2014/main" id="{A4D1118D-F912-4D90-9D07-E72981FC62CF}"/>
+                <a16:creationId xmlns:a16="http://schemas.microsoft.com/office/drawing/2014/main" id="{0C803455-49D8-404F-841A-EFA3ADEB5C6C}"/>
               </a:ext>
             </a:extLst>
           </p:cNvPr>
@@ -3856,7 +3856,7 @@
           <p:cNvPr id="16" name="">
             <a:extLst xmlns:a="http://schemas.openxmlformats.org/drawingml/2006/main">
               <a:ext uri="{FF2B5EF4-FFF2-40B4-BE49-F238E27FC236}">
-                <a16:creationId xmlns:a16="http://schemas.microsoft.com/office/drawing/2014/main" id="{5233B4A6-05CA-4C5C-A532-256CAAC2D03A}"/>
+                <a16:creationId xmlns:a16="http://schemas.microsoft.com/office/drawing/2014/main" id="{1769953F-AD71-4661-88B3-9A71FD02EB2D}"/>
               </a:ext>
             </a:extLst>
           </p:cNvPr>
@@ -3913,7 +3913,7 @@
           <p:cNvPr id="17" name="">
             <a:extLst xmlns:a="http://schemas.openxmlformats.org/drawingml/2006/main">
               <a:ext uri="{FF2B5EF4-FFF2-40B4-BE49-F238E27FC236}">
-                <a16:creationId xmlns:a16="http://schemas.microsoft.com/office/drawing/2014/main" id="{E3AA6113-F5DC-4ED3-80AC-9B52FFFBF7E8}"/>
+                <a16:creationId xmlns:a16="http://schemas.microsoft.com/office/drawing/2014/main" id="{36D35D98-78CA-4B70-9D30-C1C3B479B2F8}"/>
               </a:ext>
             </a:extLst>
           </p:cNvPr>
@@ -3970,7 +3970,7 @@
           <p:cNvPr id="18" name="">
             <a:extLst xmlns:a="http://schemas.openxmlformats.org/drawingml/2006/main">
               <a:ext uri="{FF2B5EF4-FFF2-40B4-BE49-F238E27FC236}">
-                <a16:creationId xmlns:a16="http://schemas.microsoft.com/office/drawing/2014/main" id="{6E845EBC-03F6-4557-8F2D-26D93847D1B9}"/>
+                <a16:creationId xmlns:a16="http://schemas.microsoft.com/office/drawing/2014/main" id="{A0FB9040-88CE-4E9F-A70D-6D4566DB18DD}"/>
               </a:ext>
             </a:extLst>
           </p:cNvPr>
@@ -4027,7 +4027,7 @@
           <p:cNvPr id="19" name="">
             <a:extLst xmlns:a="http://schemas.openxmlformats.org/drawingml/2006/main">
               <a:ext uri="{FF2B5EF4-FFF2-40B4-BE49-F238E27FC236}">
-                <a16:creationId xmlns:a16="http://schemas.microsoft.com/office/drawing/2014/main" id="{33D95DF9-F082-41E8-A46C-564C0C0E9C6F}"/>
+                <a16:creationId xmlns:a16="http://schemas.microsoft.com/office/drawing/2014/main" id="{338B32F6-74CA-43E8-87E8-A2F942BE4356}"/>
               </a:ext>
             </a:extLst>
           </p:cNvPr>
@@ -4084,7 +4084,7 @@
           <p:cNvPr id="20" name="">
             <a:extLst xmlns:a="http://schemas.openxmlformats.org/drawingml/2006/main">
               <a:ext uri="{FF2B5EF4-FFF2-40B4-BE49-F238E27FC236}">
-                <a16:creationId xmlns:a16="http://schemas.microsoft.com/office/drawing/2014/main" id="{BE075CD4-7ABC-4229-A26D-2337FAAF04F2}"/>
+                <a16:creationId xmlns:a16="http://schemas.microsoft.com/office/drawing/2014/main" id="{1741A6C4-E2C4-4F13-89A9-1910DF78A284}"/>
               </a:ext>
             </a:extLst>
           </p:cNvPr>
@@ -4139,7 +4139,7 @@
     </p:spTree>
     <p:extLst>
       <p:ext uri="{BB962C8B-B14F-4D97-AF65-F5344CB8AC3E}">
-        <p14:creationId xmlns:p14="http://schemas.microsoft.com/office/powerpoint/2010/main" val="153138261"/>
+        <p14:creationId xmlns:p14="http://schemas.microsoft.com/office/powerpoint/2010/main" val="1432878976"/>
       </p:ext>
     </p:extLst>
   </p:cSld>
@@ -4170,7 +4170,7 @@
           <p:cNvPr id="33" name="">
             <a:extLst xmlns:a="http://schemas.openxmlformats.org/drawingml/2006/main">
               <a:ext uri="{FF2B5EF4-FFF2-40B4-BE49-F238E27FC236}">
-                <a16:creationId xmlns:a16="http://schemas.microsoft.com/office/drawing/2014/main" id="{D0530EFF-AAA0-4F8E-A5F0-3A13E9F7F2BA}"/>
+                <a16:creationId xmlns:a16="http://schemas.microsoft.com/office/drawing/2014/main" id="{A6FFEC17-1F00-4CEB-A76F-44EC4E474DFF}"/>
               </a:ext>
             </a:extLst>
           </p:cNvPr>
@@ -4227,7 +4227,7 @@
           <p:cNvPr id="2" name="">
             <a:extLst xmlns:a="http://schemas.openxmlformats.org/drawingml/2006/main">
               <a:ext uri="{FF2B5EF4-FFF2-40B4-BE49-F238E27FC236}">
-                <a16:creationId xmlns:a16="http://schemas.microsoft.com/office/drawing/2014/main" id="{0EB3BF80-09FE-4F96-AB56-A195A5FBDB40}"/>
+                <a16:creationId xmlns:a16="http://schemas.microsoft.com/office/drawing/2014/main" id="{3C308F6D-D7A7-43E4-B6D9-DCA03ECD02AD}"/>
               </a:ext>
             </a:extLst>
           </p:cNvPr>
@@ -4284,7 +4284,7 @@
           <p:cNvPr id="3" name="">
             <a:extLst xmlns:a="http://schemas.openxmlformats.org/drawingml/2006/main">
               <a:ext uri="{FF2B5EF4-FFF2-40B4-BE49-F238E27FC236}">
-                <a16:creationId xmlns:a16="http://schemas.microsoft.com/office/drawing/2014/main" id="{6BB17D01-3A5D-43D3-90EC-FE6D159B8DF3}"/>
+                <a16:creationId xmlns:a16="http://schemas.microsoft.com/office/drawing/2014/main" id="{A6EB376E-B2AE-4724-8DE3-D03468D42116}"/>
               </a:ext>
             </a:extLst>
           </p:cNvPr>
@@ -4314,7 +4314,7 @@
           <p:cNvPr id="4" name="">
             <a:extLst xmlns:a="http://schemas.openxmlformats.org/drawingml/2006/main">
               <a:ext uri="{FF2B5EF4-FFF2-40B4-BE49-F238E27FC236}">
-                <a16:creationId xmlns:a16="http://schemas.microsoft.com/office/drawing/2014/main" id="{B03CB361-AF8F-4979-B94C-8C4CC99CF1EF}"/>
+                <a16:creationId xmlns:a16="http://schemas.microsoft.com/office/drawing/2014/main" id="{DC1DA1BF-4AF0-48ED-A09D-A1368E05CDE4}"/>
               </a:ext>
             </a:extLst>
           </p:cNvPr>
@@ -4371,7 +4371,7 @@
           <p:cNvPr id="5" name="">
             <a:extLst xmlns:a="http://schemas.openxmlformats.org/drawingml/2006/main">
               <a:ext uri="{FF2B5EF4-FFF2-40B4-BE49-F238E27FC236}">
-                <a16:creationId xmlns:a16="http://schemas.microsoft.com/office/drawing/2014/main" id="{A0345EBE-E96F-48B4-920A-EA07FC760CD9}"/>
+                <a16:creationId xmlns:a16="http://schemas.microsoft.com/office/drawing/2014/main" id="{56C63B98-07FF-438C-8CFE-259757041AC6}"/>
               </a:ext>
             </a:extLst>
           </p:cNvPr>
@@ -4428,7 +4428,7 @@
           <p:cNvPr id="6" name="">
             <a:extLst xmlns:a="http://schemas.openxmlformats.org/drawingml/2006/main">
               <a:ext uri="{FF2B5EF4-FFF2-40B4-BE49-F238E27FC236}">
-                <a16:creationId xmlns:a16="http://schemas.microsoft.com/office/drawing/2014/main" id="{7B935102-BB57-4CFE-90DB-933DB3811EB1}"/>
+                <a16:creationId xmlns:a16="http://schemas.microsoft.com/office/drawing/2014/main" id="{29ADE47C-998F-48EF-926A-3A4DB29051BF}"/>
               </a:ext>
             </a:extLst>
           </p:cNvPr>
@@ -4485,7 +4485,7 @@
           <p:cNvPr id="7" name="">
             <a:extLst xmlns:a="http://schemas.openxmlformats.org/drawingml/2006/main">
               <a:ext uri="{FF2B5EF4-FFF2-40B4-BE49-F238E27FC236}">
-                <a16:creationId xmlns:a16="http://schemas.microsoft.com/office/drawing/2014/main" id="{2A9169CA-137E-44D3-8C46-5B8CF388D32D}"/>
+                <a16:creationId xmlns:a16="http://schemas.microsoft.com/office/drawing/2014/main" id="{73CE78CF-EEBB-4C12-8026-01CCC4375BA3}"/>
               </a:ext>
             </a:extLst>
           </p:cNvPr>
@@ -4515,7 +4515,7 @@
           <p:cNvPr id="8" name="">
             <a:extLst xmlns:a="http://schemas.openxmlformats.org/drawingml/2006/main">
               <a:ext uri="{FF2B5EF4-FFF2-40B4-BE49-F238E27FC236}">
-                <a16:creationId xmlns:a16="http://schemas.microsoft.com/office/drawing/2014/main" id="{BE1BA662-1BAE-47F2-9E63-D574BE2C2C98}"/>
+                <a16:creationId xmlns:a16="http://schemas.microsoft.com/office/drawing/2014/main" id="{7437B520-3893-4D9F-9BE5-55DBB408A475}"/>
               </a:ext>
             </a:extLst>
           </p:cNvPr>
@@ -4572,7 +4572,7 @@
           <p:cNvPr id="9" name="">
             <a:extLst xmlns:a="http://schemas.openxmlformats.org/drawingml/2006/main">
               <a:ext uri="{FF2B5EF4-FFF2-40B4-BE49-F238E27FC236}">
-                <a16:creationId xmlns:a16="http://schemas.microsoft.com/office/drawing/2014/main" id="{054B4D8B-E727-45D0-A853-B51327888D6C}"/>
+                <a16:creationId xmlns:a16="http://schemas.microsoft.com/office/drawing/2014/main" id="{E8F488B5-6EC6-4685-8C88-F0F352B9C687}"/>
               </a:ext>
             </a:extLst>
           </p:cNvPr>
@@ -4629,7 +4629,7 @@
           <p:cNvPr id="10" name="">
             <a:extLst xmlns:a="http://schemas.openxmlformats.org/drawingml/2006/main">
               <a:ext uri="{FF2B5EF4-FFF2-40B4-BE49-F238E27FC236}">
-                <a16:creationId xmlns:a16="http://schemas.microsoft.com/office/drawing/2014/main" id="{995FC901-16F1-42BF-A47C-E27E6FFD3016}"/>
+                <a16:creationId xmlns:a16="http://schemas.microsoft.com/office/drawing/2014/main" id="{4C5CA955-A289-4334-B474-825B1671CFD5}"/>
               </a:ext>
             </a:extLst>
           </p:cNvPr>
@@ -4686,7 +4686,7 @@
           <p:cNvPr id="11" name="">
             <a:extLst xmlns:a="http://schemas.openxmlformats.org/drawingml/2006/main">
               <a:ext uri="{FF2B5EF4-FFF2-40B4-BE49-F238E27FC236}">
-                <a16:creationId xmlns:a16="http://schemas.microsoft.com/office/drawing/2014/main" id="{400FF7A1-51E5-4350-A4BC-072C63DC1EE1}"/>
+                <a16:creationId xmlns:a16="http://schemas.microsoft.com/office/drawing/2014/main" id="{8C2CB30C-9FD2-41C8-A59C-5960D06FDDFC}"/>
               </a:ext>
             </a:extLst>
           </p:cNvPr>
@@ -4716,7 +4716,7 @@
           <p:cNvPr id="12" name="">
             <a:extLst xmlns:a="http://schemas.openxmlformats.org/drawingml/2006/main">
               <a:ext uri="{FF2B5EF4-FFF2-40B4-BE49-F238E27FC236}">
-                <a16:creationId xmlns:a16="http://schemas.microsoft.com/office/drawing/2014/main" id="{A690B721-5B19-4F38-A462-39FEBA121601}"/>
+                <a16:creationId xmlns:a16="http://schemas.microsoft.com/office/drawing/2014/main" id="{CC8E3D9D-7461-4858-ACC5-DB41D6E8A18F}"/>
               </a:ext>
             </a:extLst>
           </p:cNvPr>
@@ -4773,7 +4773,7 @@
           <p:cNvPr id="13" name="">
             <a:extLst xmlns:a="http://schemas.openxmlformats.org/drawingml/2006/main">
               <a:ext uri="{FF2B5EF4-FFF2-40B4-BE49-F238E27FC236}">
-                <a16:creationId xmlns:a16="http://schemas.microsoft.com/office/drawing/2014/main" id="{4F423CD9-4D00-4BD7-80E8-8517657F4DB8}"/>
+                <a16:creationId xmlns:a16="http://schemas.microsoft.com/office/drawing/2014/main" id="{3863DD0C-A6AF-470C-950B-680C6696E511}"/>
               </a:ext>
             </a:extLst>
           </p:cNvPr>
@@ -4830,7 +4830,7 @@
           <p:cNvPr id="14" name="">
             <a:extLst xmlns:a="http://schemas.openxmlformats.org/drawingml/2006/main">
               <a:ext uri="{FF2B5EF4-FFF2-40B4-BE49-F238E27FC236}">
-                <a16:creationId xmlns:a16="http://schemas.microsoft.com/office/drawing/2014/main" id="{F62F26A9-FC07-4DDB-BE01-BF67B7B3D355}"/>
+                <a16:creationId xmlns:a16="http://schemas.microsoft.com/office/drawing/2014/main" id="{CF3B756D-C48A-4826-BE01-835824EEB8FF}"/>
               </a:ext>
             </a:extLst>
           </p:cNvPr>
@@ -4887,7 +4887,7 @@
           <p:cNvPr id="15" name="">
             <a:extLst xmlns:a="http://schemas.openxmlformats.org/drawingml/2006/main">
               <a:ext uri="{FF2B5EF4-FFF2-40B4-BE49-F238E27FC236}">
-                <a16:creationId xmlns:a16="http://schemas.microsoft.com/office/drawing/2014/main" id="{2ECBAC49-B070-43E4-8CD3-AA404A7C6CAE}"/>
+                <a16:creationId xmlns:a16="http://schemas.microsoft.com/office/drawing/2014/main" id="{AD57BBC0-13A3-4705-9C28-A532E308753A}"/>
               </a:ext>
             </a:extLst>
           </p:cNvPr>
@@ -4917,7 +4917,7 @@
           <p:cNvPr id="16" name="">
             <a:extLst xmlns:a="http://schemas.openxmlformats.org/drawingml/2006/main">
               <a:ext uri="{FF2B5EF4-FFF2-40B4-BE49-F238E27FC236}">
-                <a16:creationId xmlns:a16="http://schemas.microsoft.com/office/drawing/2014/main" id="{0C95F18E-E678-4D66-AEE2-A28F38D4FA89}"/>
+                <a16:creationId xmlns:a16="http://schemas.microsoft.com/office/drawing/2014/main" id="{6658EEF2-136E-433E-9646-14F121AF5331}"/>
               </a:ext>
             </a:extLst>
           </p:cNvPr>
@@ -4974,7 +4974,7 @@
           <p:cNvPr id="17" name="">
             <a:extLst xmlns:a="http://schemas.openxmlformats.org/drawingml/2006/main">
               <a:ext uri="{FF2B5EF4-FFF2-40B4-BE49-F238E27FC236}">
-                <a16:creationId xmlns:a16="http://schemas.microsoft.com/office/drawing/2014/main" id="{71AB1832-195B-44C3-8E98-9CDE34BADEDE}"/>
+                <a16:creationId xmlns:a16="http://schemas.microsoft.com/office/drawing/2014/main" id="{D164973E-1A24-408A-B84F-65BD9A3ECE6B}"/>
               </a:ext>
             </a:extLst>
           </p:cNvPr>
@@ -5031,7 +5031,7 @@
           <p:cNvPr id="18" name="">
             <a:extLst xmlns:a="http://schemas.openxmlformats.org/drawingml/2006/main">
               <a:ext uri="{FF2B5EF4-FFF2-40B4-BE49-F238E27FC236}">
-                <a16:creationId xmlns:a16="http://schemas.microsoft.com/office/drawing/2014/main" id="{8C0602A2-4D7E-4275-A5C1-937F5B06A0EC}"/>
+                <a16:creationId xmlns:a16="http://schemas.microsoft.com/office/drawing/2014/main" id="{185E3E83-5556-407F-B067-37AF6330D53C}"/>
               </a:ext>
             </a:extLst>
           </p:cNvPr>
@@ -5088,7 +5088,7 @@
           <p:cNvPr id="19" name="">
             <a:extLst xmlns:a="http://schemas.openxmlformats.org/drawingml/2006/main">
               <a:ext uri="{FF2B5EF4-FFF2-40B4-BE49-F238E27FC236}">
-                <a16:creationId xmlns:a16="http://schemas.microsoft.com/office/drawing/2014/main" id="{A8176722-05F0-4B37-92FB-D2118C391133}"/>
+                <a16:creationId xmlns:a16="http://schemas.microsoft.com/office/drawing/2014/main" id="{7AF1648D-2DE8-42C8-A3AF-50A8135D7B29}"/>
               </a:ext>
             </a:extLst>
           </p:cNvPr>
@@ -5118,7 +5118,7 @@
           <p:cNvPr id="20" name="">
             <a:extLst xmlns:a="http://schemas.openxmlformats.org/drawingml/2006/main">
               <a:ext uri="{FF2B5EF4-FFF2-40B4-BE49-F238E27FC236}">
-                <a16:creationId xmlns:a16="http://schemas.microsoft.com/office/drawing/2014/main" id="{08E76C6B-EB69-449C-A882-2D9170E3F487}"/>
+                <a16:creationId xmlns:a16="http://schemas.microsoft.com/office/drawing/2014/main" id="{C21ABF0D-11E0-473E-82E3-86156BC159C3}"/>
               </a:ext>
             </a:extLst>
           </p:cNvPr>
@@ -5175,7 +5175,7 @@
           <p:cNvPr id="21" name="">
             <a:extLst xmlns:a="http://schemas.openxmlformats.org/drawingml/2006/main">
               <a:ext uri="{FF2B5EF4-FFF2-40B4-BE49-F238E27FC236}">
-                <a16:creationId xmlns:a16="http://schemas.microsoft.com/office/drawing/2014/main" id="{E6F643BE-22B1-475E-A47A-2AA56F0E79FA}"/>
+                <a16:creationId xmlns:a16="http://schemas.microsoft.com/office/drawing/2014/main" id="{0BB4D3B0-50F2-4578-8801-A0AECDB83345}"/>
               </a:ext>
             </a:extLst>
           </p:cNvPr>
@@ -5232,7 +5232,7 @@
           <p:cNvPr id="22" name="">
             <a:extLst xmlns:a="http://schemas.openxmlformats.org/drawingml/2006/main">
               <a:ext uri="{FF2B5EF4-FFF2-40B4-BE49-F238E27FC236}">
-                <a16:creationId xmlns:a16="http://schemas.microsoft.com/office/drawing/2014/main" id="{B3307DDA-20EA-4D87-8B88-9C2A89BD1760}"/>
+                <a16:creationId xmlns:a16="http://schemas.microsoft.com/office/drawing/2014/main" id="{942259AE-DA10-48AA-BE48-E21BA0E27881}"/>
               </a:ext>
             </a:extLst>
           </p:cNvPr>
@@ -5289,7 +5289,7 @@
           <p:cNvPr id="23" name="">
             <a:extLst xmlns:a="http://schemas.openxmlformats.org/drawingml/2006/main">
               <a:ext uri="{FF2B5EF4-FFF2-40B4-BE49-F238E27FC236}">
-                <a16:creationId xmlns:a16="http://schemas.microsoft.com/office/drawing/2014/main" id="{923D68C2-E8C6-4F07-8C3F-307057D8C9D7}"/>
+                <a16:creationId xmlns:a16="http://schemas.microsoft.com/office/drawing/2014/main" id="{AC80BE3E-DB2E-4DEB-B1A5-494D3D4F7FED}"/>
               </a:ext>
             </a:extLst>
           </p:cNvPr>
@@ -5319,7 +5319,7 @@
           <p:cNvPr id="24" name="">
             <a:extLst xmlns:a="http://schemas.openxmlformats.org/drawingml/2006/main">
               <a:ext uri="{FF2B5EF4-FFF2-40B4-BE49-F238E27FC236}">
-                <a16:creationId xmlns:a16="http://schemas.microsoft.com/office/drawing/2014/main" id="{33BFDB5B-3FD6-4781-BD33-2AFA45A0557A}"/>
+                <a16:creationId xmlns:a16="http://schemas.microsoft.com/office/drawing/2014/main" id="{D5C91D89-9D0A-4DF9-A5E7-7C8268D8C06A}"/>
               </a:ext>
             </a:extLst>
           </p:cNvPr>
@@ -5376,7 +5376,7 @@
           <p:cNvPr id="25" name="">
             <a:extLst xmlns:a="http://schemas.openxmlformats.org/drawingml/2006/main">
               <a:ext uri="{FF2B5EF4-FFF2-40B4-BE49-F238E27FC236}">
-                <a16:creationId xmlns:a16="http://schemas.microsoft.com/office/drawing/2014/main" id="{3B9A2549-1C81-4834-8151-4744EC39C46E}"/>
+                <a16:creationId xmlns:a16="http://schemas.microsoft.com/office/drawing/2014/main" id="{31933F70-8529-4444-ABB4-35165BD05CC1}"/>
               </a:ext>
             </a:extLst>
           </p:cNvPr>
@@ -5433,7 +5433,7 @@
           <p:cNvPr id="26" name="">
             <a:extLst xmlns:a="http://schemas.openxmlformats.org/drawingml/2006/main">
               <a:ext uri="{FF2B5EF4-FFF2-40B4-BE49-F238E27FC236}">
-                <a16:creationId xmlns:a16="http://schemas.microsoft.com/office/drawing/2014/main" id="{C942CA4B-6114-4013-8E0F-7256CDB11F20}"/>
+                <a16:creationId xmlns:a16="http://schemas.microsoft.com/office/drawing/2014/main" id="{B9E8CC7A-8E79-405C-A8E7-1D4A9DD51E31}"/>
               </a:ext>
             </a:extLst>
           </p:cNvPr>
@@ -5490,7 +5490,7 @@
           <p:cNvPr id="27" name="">
             <a:extLst xmlns:a="http://schemas.openxmlformats.org/drawingml/2006/main">
               <a:ext uri="{FF2B5EF4-FFF2-40B4-BE49-F238E27FC236}">
-                <a16:creationId xmlns:a16="http://schemas.microsoft.com/office/drawing/2014/main" id="{66267803-2F70-4D4C-86F0-ED6A943F78B5}"/>
+                <a16:creationId xmlns:a16="http://schemas.microsoft.com/office/drawing/2014/main" id="{2AC7EA2C-ADF8-4657-BCFB-30D78EED87C1}"/>
               </a:ext>
             </a:extLst>
           </p:cNvPr>
@@ -5520,7 +5520,7 @@
           <p:cNvPr id="28" name="">
             <a:extLst xmlns:a="http://schemas.openxmlformats.org/drawingml/2006/main">
               <a:ext uri="{FF2B5EF4-FFF2-40B4-BE49-F238E27FC236}">
-                <a16:creationId xmlns:a16="http://schemas.microsoft.com/office/drawing/2014/main" id="{09A7EF95-6E3D-4C19-BFF1-161FC4693C5C}"/>
+                <a16:creationId xmlns:a16="http://schemas.microsoft.com/office/drawing/2014/main" id="{5A66E272-BE96-47C4-A730-A146CBE19F8B}"/>
               </a:ext>
             </a:extLst>
           </p:cNvPr>
@@ -5577,7 +5577,7 @@
           <p:cNvPr id="29" name="">
             <a:extLst xmlns:a="http://schemas.openxmlformats.org/drawingml/2006/main">
               <a:ext uri="{FF2B5EF4-FFF2-40B4-BE49-F238E27FC236}">
-                <a16:creationId xmlns:a16="http://schemas.microsoft.com/office/drawing/2014/main" id="{258E6D15-27CA-465B-B8DC-86242979377F}"/>
+                <a16:creationId xmlns:a16="http://schemas.microsoft.com/office/drawing/2014/main" id="{6A3D0E54-F9CF-434D-9752-96E1A90AA5D1}"/>
               </a:ext>
             </a:extLst>
           </p:cNvPr>
@@ -5634,7 +5634,7 @@
           <p:cNvPr id="30" name="">
             <a:extLst xmlns:a="http://schemas.openxmlformats.org/drawingml/2006/main">
               <a:ext uri="{FF2B5EF4-FFF2-40B4-BE49-F238E27FC236}">
-                <a16:creationId xmlns:a16="http://schemas.microsoft.com/office/drawing/2014/main" id="{0BEEF5C3-36C0-49E9-AC6C-90BC8AA2EEB5}"/>
+                <a16:creationId xmlns:a16="http://schemas.microsoft.com/office/drawing/2014/main" id="{C32002BC-AC43-42B7-BA5B-B12324E5703C}"/>
               </a:ext>
             </a:extLst>
           </p:cNvPr>
@@ -5691,7 +5691,7 @@
           <p:cNvPr id="31" name="">
             <a:extLst xmlns:a="http://schemas.openxmlformats.org/drawingml/2006/main">
               <a:ext uri="{FF2B5EF4-FFF2-40B4-BE49-F238E27FC236}">
-                <a16:creationId xmlns:a16="http://schemas.microsoft.com/office/drawing/2014/main" id="{BF2A6923-8CFB-4982-B4B7-4D96B6DE1BFD}"/>
+                <a16:creationId xmlns:a16="http://schemas.microsoft.com/office/drawing/2014/main" id="{785369F1-5581-4005-BEC0-DF3DFA1CF129}"/>
               </a:ext>
             </a:extLst>
           </p:cNvPr>
@@ -5748,7 +5748,7 @@
           <p:cNvPr id="32" name="">
             <a:extLst xmlns:a="http://schemas.openxmlformats.org/drawingml/2006/main">
               <a:ext uri="{FF2B5EF4-FFF2-40B4-BE49-F238E27FC236}">
-                <a16:creationId xmlns:a16="http://schemas.microsoft.com/office/drawing/2014/main" id="{71D5FEE1-7983-44A3-92A1-A08E3BE9AE40}"/>
+                <a16:creationId xmlns:a16="http://schemas.microsoft.com/office/drawing/2014/main" id="{52B7D011-7160-4CA8-BDA3-08EFE7A85EC8}"/>
               </a:ext>
             </a:extLst>
           </p:cNvPr>
@@ -5803,7 +5803,7 @@
     </p:spTree>
     <p:extLst>
       <p:ext uri="{BB962C8B-B14F-4D97-AF65-F5344CB8AC3E}">
-        <p14:creationId xmlns:p14="http://schemas.microsoft.com/office/powerpoint/2010/main" val="751191635"/>
+        <p14:creationId xmlns:p14="http://schemas.microsoft.com/office/powerpoint/2010/main" val="525462919"/>
       </p:ext>
     </p:extLst>
   </p:cSld>
@@ -5834,7 +5834,7 @@
           <p:cNvPr id="27" name="">
             <a:extLst xmlns:a="http://schemas.openxmlformats.org/drawingml/2006/main">
               <a:ext uri="{FF2B5EF4-FFF2-40B4-BE49-F238E27FC236}">
-                <a16:creationId xmlns:a16="http://schemas.microsoft.com/office/drawing/2014/main" id="{2096B80F-ED58-495F-9076-74D873BA4B12}"/>
+                <a16:creationId xmlns:a16="http://schemas.microsoft.com/office/drawing/2014/main" id="{2B11AC72-982E-425C-9894-4FFF8CD8718B}"/>
               </a:ext>
             </a:extLst>
           </p:cNvPr>
@@ -5891,7 +5891,7 @@
           <p:cNvPr id="2" name="">
             <a:extLst xmlns:a="http://schemas.openxmlformats.org/drawingml/2006/main">
               <a:ext uri="{FF2B5EF4-FFF2-40B4-BE49-F238E27FC236}">
-                <a16:creationId xmlns:a16="http://schemas.microsoft.com/office/drawing/2014/main" id="{38C9203C-2140-4426-B440-5650DE8018D1}"/>
+                <a16:creationId xmlns:a16="http://schemas.microsoft.com/office/drawing/2014/main" id="{1BD818D8-7C02-4CDF-A1E2-23DD500B81E9}"/>
               </a:ext>
             </a:extLst>
           </p:cNvPr>
@@ -5948,7 +5948,7 @@
           <p:cNvPr id="3" name="">
             <a:extLst xmlns:a="http://schemas.openxmlformats.org/drawingml/2006/main">
               <a:ext uri="{FF2B5EF4-FFF2-40B4-BE49-F238E27FC236}">
-                <a16:creationId xmlns:a16="http://schemas.microsoft.com/office/drawing/2014/main" id="{DA40496F-58EA-4AE7-9CA9-11CBE4161FF7}"/>
+                <a16:creationId xmlns:a16="http://schemas.microsoft.com/office/drawing/2014/main" id="{0E1E18E8-A28D-4110-B748-4879F2317E93}"/>
               </a:ext>
             </a:extLst>
           </p:cNvPr>
@@ -6005,7 +6005,7 @@
           <p:cNvPr id="4" name="">
             <a:extLst xmlns:a="http://schemas.openxmlformats.org/drawingml/2006/main">
               <a:ext uri="{FF2B5EF4-FFF2-40B4-BE49-F238E27FC236}">
-                <a16:creationId xmlns:a16="http://schemas.microsoft.com/office/drawing/2014/main" id="{037637EE-D045-4CDA-ACC3-A382893FE738}"/>
+                <a16:creationId xmlns:a16="http://schemas.microsoft.com/office/drawing/2014/main" id="{360E8321-63C4-42B0-B115-AB44025BA86D}"/>
               </a:ext>
             </a:extLst>
           </p:cNvPr>
@@ -6062,7 +6062,7 @@
           <p:cNvPr id="5" name="">
             <a:extLst xmlns:a="http://schemas.openxmlformats.org/drawingml/2006/main">
               <a:ext uri="{FF2B5EF4-FFF2-40B4-BE49-F238E27FC236}">
-                <a16:creationId xmlns:a16="http://schemas.microsoft.com/office/drawing/2014/main" id="{F6F3FD47-B0F2-4A2E-8A07-2EF12319D6C6}"/>
+                <a16:creationId xmlns:a16="http://schemas.microsoft.com/office/drawing/2014/main" id="{2369873B-8BDD-4C27-9D96-E90E61F1617B}"/>
               </a:ext>
             </a:extLst>
           </p:cNvPr>
@@ -6119,7 +6119,7 @@
           <p:cNvPr id="6" name="">
             <a:extLst xmlns:a="http://schemas.openxmlformats.org/drawingml/2006/main">
               <a:ext uri="{FF2B5EF4-FFF2-40B4-BE49-F238E27FC236}">
-                <a16:creationId xmlns:a16="http://schemas.microsoft.com/office/drawing/2014/main" id="{DC1C16D9-769D-4311-94A2-75BC72B6DFD0}"/>
+                <a16:creationId xmlns:a16="http://schemas.microsoft.com/office/drawing/2014/main" id="{097B4862-CA9A-47E4-BDC7-A9CD16FA9B8E}"/>
               </a:ext>
             </a:extLst>
           </p:cNvPr>
@@ -6176,7 +6176,7 @@
           <p:cNvPr id="7" name="">
             <a:extLst xmlns:a="http://schemas.openxmlformats.org/drawingml/2006/main">
               <a:ext uri="{FF2B5EF4-FFF2-40B4-BE49-F238E27FC236}">
-                <a16:creationId xmlns:a16="http://schemas.microsoft.com/office/drawing/2014/main" id="{C6B2D85D-2281-4F67-A4CA-E554267B3819}"/>
+                <a16:creationId xmlns:a16="http://schemas.microsoft.com/office/drawing/2014/main" id="{B1FBB854-3F62-4B1E-831B-D6A4F72EF45F}"/>
               </a:ext>
             </a:extLst>
           </p:cNvPr>
@@ -6206,7 +6206,7 @@
           <p:cNvPr id="8" name="">
             <a:extLst xmlns:a="http://schemas.openxmlformats.org/drawingml/2006/main">
               <a:ext uri="{FF2B5EF4-FFF2-40B4-BE49-F238E27FC236}">
-                <a16:creationId xmlns:a16="http://schemas.microsoft.com/office/drawing/2014/main" id="{1B47FE95-0690-4D4C-B18B-398158EFA1FB}"/>
+                <a16:creationId xmlns:a16="http://schemas.microsoft.com/office/drawing/2014/main" id="{0A98321D-1108-4D8D-B145-CC3285C8311C}"/>
               </a:ext>
             </a:extLst>
           </p:cNvPr>
@@ -6263,7 +6263,7 @@
           <p:cNvPr id="9" name="">
             <a:extLst xmlns:a="http://schemas.openxmlformats.org/drawingml/2006/main">
               <a:ext uri="{FF2B5EF4-FFF2-40B4-BE49-F238E27FC236}">
-                <a16:creationId xmlns:a16="http://schemas.microsoft.com/office/drawing/2014/main" id="{E84E20A5-26E6-4E64-8DB4-E1F748739EF7}"/>
+                <a16:creationId xmlns:a16="http://schemas.microsoft.com/office/drawing/2014/main" id="{91EE6B8B-5CC8-4A1D-80C1-7A4F114116D1}"/>
               </a:ext>
             </a:extLst>
           </p:cNvPr>
@@ -6320,7 +6320,7 @@
           <p:cNvPr id="10" name="">
             <a:extLst xmlns:a="http://schemas.openxmlformats.org/drawingml/2006/main">
               <a:ext uri="{FF2B5EF4-FFF2-40B4-BE49-F238E27FC236}">
-                <a16:creationId xmlns:a16="http://schemas.microsoft.com/office/drawing/2014/main" id="{D870A2A3-51D4-4E40-8BEF-15B4F235F5B7}"/>
+                <a16:creationId xmlns:a16="http://schemas.microsoft.com/office/drawing/2014/main" id="{AA83B5BD-C448-48E6-96EC-E5F5356C676A}"/>
               </a:ext>
             </a:extLst>
           </p:cNvPr>
@@ -6350,7 +6350,7 @@
           <p:cNvPr id="11" name="">
             <a:extLst xmlns:a="http://schemas.openxmlformats.org/drawingml/2006/main">
               <a:ext uri="{FF2B5EF4-FFF2-40B4-BE49-F238E27FC236}">
-                <a16:creationId xmlns:a16="http://schemas.microsoft.com/office/drawing/2014/main" id="{91621FBF-2450-453E-83B3-5328F0E26E5C}"/>
+                <a16:creationId xmlns:a16="http://schemas.microsoft.com/office/drawing/2014/main" id="{8E0EE4D3-7D20-4DC5-ACCE-C74FFDC27B55}"/>
               </a:ext>
             </a:extLst>
           </p:cNvPr>
@@ -6407,7 +6407,7 @@
           <p:cNvPr id="12" name="">
             <a:extLst xmlns:a="http://schemas.openxmlformats.org/drawingml/2006/main">
               <a:ext uri="{FF2B5EF4-FFF2-40B4-BE49-F238E27FC236}">
-                <a16:creationId xmlns:a16="http://schemas.microsoft.com/office/drawing/2014/main" id="{AF9976EA-FC41-4752-A926-8FC5F11C1537}"/>
+                <a16:creationId xmlns:a16="http://schemas.microsoft.com/office/drawing/2014/main" id="{4C97199A-B68F-4C6B-B6F4-13F789329F21}"/>
               </a:ext>
             </a:extLst>
           </p:cNvPr>
@@ -6464,7 +6464,7 @@
           <p:cNvPr id="13" name="">
             <a:extLst xmlns:a="http://schemas.openxmlformats.org/drawingml/2006/main">
               <a:ext uri="{FF2B5EF4-FFF2-40B4-BE49-F238E27FC236}">
-                <a16:creationId xmlns:a16="http://schemas.microsoft.com/office/drawing/2014/main" id="{4EAFE009-BC41-4DB1-8ECC-E0227B6A47AF}"/>
+                <a16:creationId xmlns:a16="http://schemas.microsoft.com/office/drawing/2014/main" id="{F0CA707C-63D6-4B3D-BA72-0C58CEAB470F}"/>
               </a:ext>
             </a:extLst>
           </p:cNvPr>
@@ -6521,7 +6521,7 @@
           <p:cNvPr id="14" name="">
             <a:extLst xmlns:a="http://schemas.openxmlformats.org/drawingml/2006/main">
               <a:ext uri="{FF2B5EF4-FFF2-40B4-BE49-F238E27FC236}">
-                <a16:creationId xmlns:a16="http://schemas.microsoft.com/office/drawing/2014/main" id="{21A9EF6A-C516-4B25-A60C-FEB815970197}"/>
+                <a16:creationId xmlns:a16="http://schemas.microsoft.com/office/drawing/2014/main" id="{E05B86A4-8F71-47D8-AB91-AEA3D051DBF7}"/>
               </a:ext>
             </a:extLst>
           </p:cNvPr>
@@ -6578,7 +6578,7 @@
           <p:cNvPr id="15" name="">
             <a:extLst xmlns:a="http://schemas.openxmlformats.org/drawingml/2006/main">
               <a:ext uri="{FF2B5EF4-FFF2-40B4-BE49-F238E27FC236}">
-                <a16:creationId xmlns:a16="http://schemas.microsoft.com/office/drawing/2014/main" id="{A313635C-4156-42DE-AAB5-B8678DAB1EC2}"/>
+                <a16:creationId xmlns:a16="http://schemas.microsoft.com/office/drawing/2014/main" id="{F62C37AE-3BA6-4678-8FDD-2F7D730A4907}"/>
               </a:ext>
             </a:extLst>
           </p:cNvPr>
@@ -6608,7 +6608,7 @@
           <p:cNvPr id="16" name="">
             <a:extLst xmlns:a="http://schemas.openxmlformats.org/drawingml/2006/main">
               <a:ext uri="{FF2B5EF4-FFF2-40B4-BE49-F238E27FC236}">
-                <a16:creationId xmlns:a16="http://schemas.microsoft.com/office/drawing/2014/main" id="{74A64685-077A-46F3-B9B0-1B409D485F0F}"/>
+                <a16:creationId xmlns:a16="http://schemas.microsoft.com/office/drawing/2014/main" id="{33C5E727-52D1-44C4-A335-F9374B9A0B92}"/>
               </a:ext>
             </a:extLst>
           </p:cNvPr>
@@ -6665,7 +6665,7 @@
           <p:cNvPr id="17" name="">
             <a:extLst xmlns:a="http://schemas.openxmlformats.org/drawingml/2006/main">
               <a:ext uri="{FF2B5EF4-FFF2-40B4-BE49-F238E27FC236}">
-                <a16:creationId xmlns:a16="http://schemas.microsoft.com/office/drawing/2014/main" id="{EA00C31D-4FE9-4A5B-BCF5-3F18A0D4A66F}"/>
+                <a16:creationId xmlns:a16="http://schemas.microsoft.com/office/drawing/2014/main" id="{470607D1-81E7-4017-939D-4A2F2069F9E6}"/>
               </a:ext>
             </a:extLst>
           </p:cNvPr>
@@ -6722,7 +6722,7 @@
           <p:cNvPr id="18" name="">
             <a:extLst xmlns:a="http://schemas.openxmlformats.org/drawingml/2006/main">
               <a:ext uri="{FF2B5EF4-FFF2-40B4-BE49-F238E27FC236}">
-                <a16:creationId xmlns:a16="http://schemas.microsoft.com/office/drawing/2014/main" id="{B0230958-7707-4A7E-87A0-597B91C1B71E}"/>
+                <a16:creationId xmlns:a16="http://schemas.microsoft.com/office/drawing/2014/main" id="{2B7DBCA6-B429-4750-B07B-AE1929483264}"/>
               </a:ext>
             </a:extLst>
           </p:cNvPr>
@@ -6752,7 +6752,7 @@
           <p:cNvPr id="19" name="">
             <a:extLst xmlns:a="http://schemas.openxmlformats.org/drawingml/2006/main">
               <a:ext uri="{FF2B5EF4-FFF2-40B4-BE49-F238E27FC236}">
-                <a16:creationId xmlns:a16="http://schemas.microsoft.com/office/drawing/2014/main" id="{64D8322E-03FF-48AD-B5DB-EBB9B3F7F22A}"/>
+                <a16:creationId xmlns:a16="http://schemas.microsoft.com/office/drawing/2014/main" id="{21DDDFA3-8FF7-4A90-B724-A861ACE970F6}"/>
               </a:ext>
             </a:extLst>
           </p:cNvPr>
@@ -6809,7 +6809,7 @@
           <p:cNvPr id="20" name="">
             <a:extLst xmlns:a="http://schemas.openxmlformats.org/drawingml/2006/main">
               <a:ext uri="{FF2B5EF4-FFF2-40B4-BE49-F238E27FC236}">
-                <a16:creationId xmlns:a16="http://schemas.microsoft.com/office/drawing/2014/main" id="{CCA6F16E-F989-49EC-AF07-8A6E42B1036F}"/>
+                <a16:creationId xmlns:a16="http://schemas.microsoft.com/office/drawing/2014/main" id="{4DA144C9-2189-458C-A81E-BB29CB348F2D}"/>
               </a:ext>
             </a:extLst>
           </p:cNvPr>
@@ -6866,7 +6866,7 @@
           <p:cNvPr id="21" name="">
             <a:extLst xmlns:a="http://schemas.openxmlformats.org/drawingml/2006/main">
               <a:ext uri="{FF2B5EF4-FFF2-40B4-BE49-F238E27FC236}">
-                <a16:creationId xmlns:a16="http://schemas.microsoft.com/office/drawing/2014/main" id="{2FB13286-DF47-47CA-9B9B-B18DBE10952E}"/>
+                <a16:creationId xmlns:a16="http://schemas.microsoft.com/office/drawing/2014/main" id="{9D93EC40-7FEC-478B-9F3B-5A3B06EBB457}"/>
               </a:ext>
             </a:extLst>
           </p:cNvPr>
@@ -6923,7 +6923,7 @@
           <p:cNvPr id="22" name="">
             <a:extLst xmlns:a="http://schemas.openxmlformats.org/drawingml/2006/main">
               <a:ext uri="{FF2B5EF4-FFF2-40B4-BE49-F238E27FC236}">
-                <a16:creationId xmlns:a16="http://schemas.microsoft.com/office/drawing/2014/main" id="{A98C8D52-7EFA-4BAE-ABFE-63EA4D365FAB}"/>
+                <a16:creationId xmlns:a16="http://schemas.microsoft.com/office/drawing/2014/main" id="{2239BF3C-0705-4B61-9CA8-9342F50F56A8}"/>
               </a:ext>
             </a:extLst>
           </p:cNvPr>
@@ -6980,7 +6980,7 @@
           <p:cNvPr id="23" name="">
             <a:extLst xmlns:a="http://schemas.openxmlformats.org/drawingml/2006/main">
               <a:ext uri="{FF2B5EF4-FFF2-40B4-BE49-F238E27FC236}">
-                <a16:creationId xmlns:a16="http://schemas.microsoft.com/office/drawing/2014/main" id="{638F800A-D975-4E46-8215-D49DF96A039C}"/>
+                <a16:creationId xmlns:a16="http://schemas.microsoft.com/office/drawing/2014/main" id="{06D3C907-5426-41F0-A8AC-259CBC468FDC}"/>
               </a:ext>
             </a:extLst>
           </p:cNvPr>
@@ -7010,7 +7010,7 @@
           <p:cNvPr id="24" name="">
             <a:extLst xmlns:a="http://schemas.openxmlformats.org/drawingml/2006/main">
               <a:ext uri="{FF2B5EF4-FFF2-40B4-BE49-F238E27FC236}">
-                <a16:creationId xmlns:a16="http://schemas.microsoft.com/office/drawing/2014/main" id="{ABB5DDD6-5133-4CEE-BECD-3AC8405B4D25}"/>
+                <a16:creationId xmlns:a16="http://schemas.microsoft.com/office/drawing/2014/main" id="{A078B74E-D3D1-42B1-B9F1-3644A06CD8E0}"/>
               </a:ext>
             </a:extLst>
           </p:cNvPr>
@@ -7067,7 +7067,7 @@
           <p:cNvPr id="25" name="">
             <a:extLst xmlns:a="http://schemas.openxmlformats.org/drawingml/2006/main">
               <a:ext uri="{FF2B5EF4-FFF2-40B4-BE49-F238E27FC236}">
-                <a16:creationId xmlns:a16="http://schemas.microsoft.com/office/drawing/2014/main" id="{517C9BA1-B085-4685-A014-8E56F59A3BDB}"/>
+                <a16:creationId xmlns:a16="http://schemas.microsoft.com/office/drawing/2014/main" id="{E04D9162-30A2-414E-A87F-C3A86E1A2C56}"/>
               </a:ext>
             </a:extLst>
           </p:cNvPr>
@@ -7124,7 +7124,7 @@
           <p:cNvPr id="26" name="">
             <a:extLst xmlns:a="http://schemas.openxmlformats.org/drawingml/2006/main">
               <a:ext uri="{FF2B5EF4-FFF2-40B4-BE49-F238E27FC236}">
-                <a16:creationId xmlns:a16="http://schemas.microsoft.com/office/drawing/2014/main" id="{88184476-628C-475E-9467-6A6F8C2AE8C4}"/>
+                <a16:creationId xmlns:a16="http://schemas.microsoft.com/office/drawing/2014/main" id="{57445DF0-7382-4944-A1EA-4BD55E13ED5E}"/>
               </a:ext>
             </a:extLst>
           </p:cNvPr>
@@ -7179,7 +7179,7 @@
     </p:spTree>
     <p:extLst>
       <p:ext uri="{BB962C8B-B14F-4D97-AF65-F5344CB8AC3E}">
-        <p14:creationId xmlns:p14="http://schemas.microsoft.com/office/powerpoint/2010/main" val="1736439684"/>
+        <p14:creationId xmlns:p14="http://schemas.microsoft.com/office/powerpoint/2010/main" val="1798001985"/>
       </p:ext>
     </p:extLst>
   </p:cSld>
@@ -7210,7 +7210,7 @@
           <p:cNvPr id="20" name="">
             <a:extLst xmlns:a="http://schemas.openxmlformats.org/drawingml/2006/main">
               <a:ext uri="{FF2B5EF4-FFF2-40B4-BE49-F238E27FC236}">
-                <a16:creationId xmlns:a16="http://schemas.microsoft.com/office/drawing/2014/main" id="{2B41E063-3A12-49EE-92E4-3695AA2EED1A}"/>
+                <a16:creationId xmlns:a16="http://schemas.microsoft.com/office/drawing/2014/main" id="{5B8D5B5D-D7E6-4E2F-8B96-4D4C2DA8FD10}"/>
               </a:ext>
             </a:extLst>
           </p:cNvPr>
@@ -7267,7 +7267,7 @@
           <p:cNvPr id="2" name="">
             <a:extLst xmlns:a="http://schemas.openxmlformats.org/drawingml/2006/main">
               <a:ext uri="{FF2B5EF4-FFF2-40B4-BE49-F238E27FC236}">
-                <a16:creationId xmlns:a16="http://schemas.microsoft.com/office/drawing/2014/main" id="{71B9B5F0-71AF-45FA-8EC9-EAFD4F36F24F}"/>
+                <a16:creationId xmlns:a16="http://schemas.microsoft.com/office/drawing/2014/main" id="{4F1A1C16-54C4-4203-9AF1-B3B25AEF6526}"/>
               </a:ext>
             </a:extLst>
           </p:cNvPr>
@@ -7324,7 +7324,7 @@
           <p:cNvPr id="3" name="">
             <a:extLst xmlns:a="http://schemas.openxmlformats.org/drawingml/2006/main">
               <a:ext uri="{FF2B5EF4-FFF2-40B4-BE49-F238E27FC236}">
-                <a16:creationId xmlns:a16="http://schemas.microsoft.com/office/drawing/2014/main" id="{F4A08DF4-7193-42EC-947F-75958E5BD9B3}"/>
+                <a16:creationId xmlns:a16="http://schemas.microsoft.com/office/drawing/2014/main" id="{F7F6DA2C-1585-4676-8450-14B060BBC70C}"/>
               </a:ext>
             </a:extLst>
           </p:cNvPr>
@@ -7354,7 +7354,7 @@
           <p:cNvPr id="4" name="">
             <a:extLst xmlns:a="http://schemas.openxmlformats.org/drawingml/2006/main">
               <a:ext uri="{FF2B5EF4-FFF2-40B4-BE49-F238E27FC236}">
-                <a16:creationId xmlns:a16="http://schemas.microsoft.com/office/drawing/2014/main" id="{D29AF067-BB96-4377-9F43-2E54F7410C99}"/>
+                <a16:creationId xmlns:a16="http://schemas.microsoft.com/office/drawing/2014/main" id="{37B3EE65-142B-4963-AC33-6C6539FBEBAA}"/>
               </a:ext>
             </a:extLst>
           </p:cNvPr>
@@ -7389,7 +7389,7 @@
           <p:cNvPr id="5" name="">
             <a:extLst xmlns:a="http://schemas.openxmlformats.org/drawingml/2006/main">
               <a:ext uri="{FF2B5EF4-FFF2-40B4-BE49-F238E27FC236}">
-                <a16:creationId xmlns:a16="http://schemas.microsoft.com/office/drawing/2014/main" id="{866A9436-D8EF-4E3D-B7C8-77F9DB897055}"/>
+                <a16:creationId xmlns:a16="http://schemas.microsoft.com/office/drawing/2014/main" id="{C4E104F6-A9D9-4BB9-9599-8955366539B6}"/>
               </a:ext>
             </a:extLst>
           </p:cNvPr>
@@ -7469,7 +7469,7 @@
           <p:cNvPr id="6" name="">
             <a:extLst xmlns:a="http://schemas.openxmlformats.org/drawingml/2006/main">
               <a:ext uri="{FF2B5EF4-FFF2-40B4-BE49-F238E27FC236}">
-                <a16:creationId xmlns:a16="http://schemas.microsoft.com/office/drawing/2014/main" id="{778C4E27-C6A1-4013-BA47-62202C50CF62}"/>
+                <a16:creationId xmlns:a16="http://schemas.microsoft.com/office/drawing/2014/main" id="{A25927F5-94BE-4251-B119-123E818EE26E}"/>
               </a:ext>
             </a:extLst>
           </p:cNvPr>
@@ -7504,7 +7504,7 @@
           <p:cNvPr id="7" name="">
             <a:extLst xmlns:a="http://schemas.openxmlformats.org/drawingml/2006/main">
               <a:ext uri="{FF2B5EF4-FFF2-40B4-BE49-F238E27FC236}">
-                <a16:creationId xmlns:a16="http://schemas.microsoft.com/office/drawing/2014/main" id="{EF3F8771-C191-4AE8-834C-712D2A6BA606}"/>
+                <a16:creationId xmlns:a16="http://schemas.microsoft.com/office/drawing/2014/main" id="{49583EF4-FEB1-4B67-9AC6-42D53C643848}"/>
               </a:ext>
             </a:extLst>
           </p:cNvPr>
@@ -7561,7 +7561,7 @@
           <p:cNvPr id="8" name="">
             <a:extLst xmlns:a="http://schemas.openxmlformats.org/drawingml/2006/main">
               <a:ext uri="{FF2B5EF4-FFF2-40B4-BE49-F238E27FC236}">
-                <a16:creationId xmlns:a16="http://schemas.microsoft.com/office/drawing/2014/main" id="{C542B1E6-D29C-4CF5-9552-8CF8B35423C1}"/>
+                <a16:creationId xmlns:a16="http://schemas.microsoft.com/office/drawing/2014/main" id="{2FA9D683-8CD9-4843-BA91-DDEA208713DD}"/>
               </a:ext>
             </a:extLst>
           </p:cNvPr>
@@ -7596,7 +7596,7 @@
           <p:cNvPr id="9" name="">
             <a:extLst xmlns:a="http://schemas.openxmlformats.org/drawingml/2006/main">
               <a:ext uri="{FF2B5EF4-FFF2-40B4-BE49-F238E27FC236}">
-                <a16:creationId xmlns:a16="http://schemas.microsoft.com/office/drawing/2014/main" id="{DBF52F6E-6C46-4EC3-B12C-64ED07C1BB4E}"/>
+                <a16:creationId xmlns:a16="http://schemas.microsoft.com/office/drawing/2014/main" id="{0A7DEBD7-BFF6-4A95-A349-C3BC646C220D}"/>
               </a:ext>
             </a:extLst>
           </p:cNvPr>
@@ -7653,7 +7653,7 @@
           <p:cNvPr id="10" name="">
             <a:extLst xmlns:a="http://schemas.openxmlformats.org/drawingml/2006/main">
               <a:ext uri="{FF2B5EF4-FFF2-40B4-BE49-F238E27FC236}">
-                <a16:creationId xmlns:a16="http://schemas.microsoft.com/office/drawing/2014/main" id="{EEB1EA4E-D627-4A8D-A394-C75CAD1D5EF4}"/>
+                <a16:creationId xmlns:a16="http://schemas.microsoft.com/office/drawing/2014/main" id="{448AE6D1-921A-4EA9-B90B-E382C564D02D}"/>
               </a:ext>
             </a:extLst>
           </p:cNvPr>
@@ -7688,7 +7688,7 @@
           <p:cNvPr id="11" name="">
             <a:extLst xmlns:a="http://schemas.openxmlformats.org/drawingml/2006/main">
               <a:ext uri="{FF2B5EF4-FFF2-40B4-BE49-F238E27FC236}">
-                <a16:creationId xmlns:a16="http://schemas.microsoft.com/office/drawing/2014/main" id="{0ECDB802-8C64-4B94-9F52-ADFD651C93EA}"/>
+                <a16:creationId xmlns:a16="http://schemas.microsoft.com/office/drawing/2014/main" id="{4A8B1D0F-4D63-4665-845D-ED70AEAB665F}"/>
               </a:ext>
             </a:extLst>
           </p:cNvPr>
@@ -7829,7 +7829,7 @@
           <p:cNvPr id="15" name="">
             <a:extLst xmlns:a="http://schemas.openxmlformats.org/drawingml/2006/main">
               <a:ext uri="{FF2B5EF4-FFF2-40B4-BE49-F238E27FC236}">
-                <a16:creationId xmlns:a16="http://schemas.microsoft.com/office/drawing/2014/main" id="{5D120F9F-A231-4D95-B8C4-43ECF49975F4}"/>
+                <a16:creationId xmlns:a16="http://schemas.microsoft.com/office/drawing/2014/main" id="{BE989690-100F-4A0B-8D60-8B06A89F323C}"/>
               </a:ext>
             </a:extLst>
           </p:cNvPr>
@@ -7886,7 +7886,7 @@
           <p:cNvPr id="16" name="">
             <a:extLst xmlns:a="http://schemas.openxmlformats.org/drawingml/2006/main">
               <a:ext uri="{FF2B5EF4-FFF2-40B4-BE49-F238E27FC236}">
-                <a16:creationId xmlns:a16="http://schemas.microsoft.com/office/drawing/2014/main" id="{AEC7E1AD-B602-42D2-9642-49329786C733}"/>
+                <a16:creationId xmlns:a16="http://schemas.microsoft.com/office/drawing/2014/main" id="{14F013CF-22BC-42B6-946A-7BD6C51E1102}"/>
               </a:ext>
             </a:extLst>
           </p:cNvPr>
@@ -7943,7 +7943,7 @@
           <p:cNvPr id="17" name="">
             <a:extLst xmlns:a="http://schemas.openxmlformats.org/drawingml/2006/main">
               <a:ext uri="{FF2B5EF4-FFF2-40B4-BE49-F238E27FC236}">
-                <a16:creationId xmlns:a16="http://schemas.microsoft.com/office/drawing/2014/main" id="{84A32F2E-4906-41A5-8E29-87500CA9004E}"/>
+                <a16:creationId xmlns:a16="http://schemas.microsoft.com/office/drawing/2014/main" id="{3ACAE9AD-A8F8-4770-84B0-1DE3ED470417}"/>
               </a:ext>
             </a:extLst>
           </p:cNvPr>
@@ -8000,7 +8000,7 @@
           <p:cNvPr id="18" name="">
             <a:extLst xmlns:a="http://schemas.openxmlformats.org/drawingml/2006/main">
               <a:ext uri="{FF2B5EF4-FFF2-40B4-BE49-F238E27FC236}">
-                <a16:creationId xmlns:a16="http://schemas.microsoft.com/office/drawing/2014/main" id="{1D657206-DB19-4285-B610-7B5E989A03A8}"/>
+                <a16:creationId xmlns:a16="http://schemas.microsoft.com/office/drawing/2014/main" id="{C8266E89-1C08-4D32-BDA1-A9000B7D9A1A}"/>
               </a:ext>
             </a:extLst>
           </p:cNvPr>
@@ -8057,7 +8057,7 @@
           <p:cNvPr id="19" name="">
             <a:extLst xmlns:a="http://schemas.openxmlformats.org/drawingml/2006/main">
               <a:ext uri="{FF2B5EF4-FFF2-40B4-BE49-F238E27FC236}">
-                <a16:creationId xmlns:a16="http://schemas.microsoft.com/office/drawing/2014/main" id="{4EA0C143-6E1F-4D4D-A4EA-79A43F7543B5}"/>
+                <a16:creationId xmlns:a16="http://schemas.microsoft.com/office/drawing/2014/main" id="{3DABF67F-FF52-404E-9BEE-B4856CED7EE9}"/>
               </a:ext>
             </a:extLst>
           </p:cNvPr>
@@ -8112,7 +8112,7 @@
     </p:spTree>
     <p:extLst>
       <p:ext uri="{BB962C8B-B14F-4D97-AF65-F5344CB8AC3E}">
-        <p14:creationId xmlns:p14="http://schemas.microsoft.com/office/powerpoint/2010/main" val="1108307730"/>
+        <p14:creationId xmlns:p14="http://schemas.microsoft.com/office/powerpoint/2010/main" val="1101043563"/>
       </p:ext>
     </p:extLst>
   </p:cSld>
@@ -8143,7 +8143,7 @@
           <p:cNvPr id="22" name="">
             <a:extLst xmlns:a="http://schemas.openxmlformats.org/drawingml/2006/main">
               <a:ext uri="{FF2B5EF4-FFF2-40B4-BE49-F238E27FC236}">
-                <a16:creationId xmlns:a16="http://schemas.microsoft.com/office/drawing/2014/main" id="{C3A1F67B-94E1-466F-910B-9615EFA3FDBF}"/>
+                <a16:creationId xmlns:a16="http://schemas.microsoft.com/office/drawing/2014/main" id="{1536C672-9720-4DF9-9380-6C4DD8E05CAC}"/>
               </a:ext>
             </a:extLst>
           </p:cNvPr>
@@ -8200,7 +8200,7 @@
           <p:cNvPr id="2" name="">
             <a:extLst xmlns:a="http://schemas.openxmlformats.org/drawingml/2006/main">
               <a:ext uri="{FF2B5EF4-FFF2-40B4-BE49-F238E27FC236}">
-                <a16:creationId xmlns:a16="http://schemas.microsoft.com/office/drawing/2014/main" id="{0765DA00-B74A-4B51-A0C6-D24EB575ACAC}"/>
+                <a16:creationId xmlns:a16="http://schemas.microsoft.com/office/drawing/2014/main" id="{41C5BBE9-B1FE-4EA9-B13D-741FF1298F04}"/>
               </a:ext>
             </a:extLst>
           </p:cNvPr>
@@ -8257,7 +8257,7 @@
           <p:cNvPr id="3" name="">
             <a:extLst xmlns:a="http://schemas.openxmlformats.org/drawingml/2006/main">
               <a:ext uri="{FF2B5EF4-FFF2-40B4-BE49-F238E27FC236}">
-                <a16:creationId xmlns:a16="http://schemas.microsoft.com/office/drawing/2014/main" id="{51AE926E-E754-4239-88B6-EC0293CFC4AA}"/>
+                <a16:creationId xmlns:a16="http://schemas.microsoft.com/office/drawing/2014/main" id="{87CA8BA7-E0B5-4A6D-B9CC-923257762DE7}"/>
               </a:ext>
             </a:extLst>
           </p:cNvPr>
@@ -8287,7 +8287,7 @@
           <p:cNvPr id="4" name="">
             <a:extLst xmlns:a="http://schemas.openxmlformats.org/drawingml/2006/main">
               <a:ext uri="{FF2B5EF4-FFF2-40B4-BE49-F238E27FC236}">
-                <a16:creationId xmlns:a16="http://schemas.microsoft.com/office/drawing/2014/main" id="{94C61FB9-0D15-4688-ABFF-07AD85064934}"/>
+                <a16:creationId xmlns:a16="http://schemas.microsoft.com/office/drawing/2014/main" id="{A3FC03CB-678B-4A61-9327-FCCF5B45A8E1}"/>
               </a:ext>
             </a:extLst>
           </p:cNvPr>
@@ -8322,7 +8322,7 @@
           <p:cNvPr id="5" name="">
             <a:extLst xmlns:a="http://schemas.openxmlformats.org/drawingml/2006/main">
               <a:ext uri="{FF2B5EF4-FFF2-40B4-BE49-F238E27FC236}">
-                <a16:creationId xmlns:a16="http://schemas.microsoft.com/office/drawing/2014/main" id="{E6F3D57E-20C4-4004-A1FD-85E583281522}"/>
+                <a16:creationId xmlns:a16="http://schemas.microsoft.com/office/drawing/2014/main" id="{0F47E303-1A3A-4FE8-A964-213F40C00DA5}"/>
               </a:ext>
             </a:extLst>
           </p:cNvPr>
@@ -8379,7 +8379,7 @@
           <p:cNvPr id="6" name="">
             <a:extLst xmlns:a="http://schemas.openxmlformats.org/drawingml/2006/main">
               <a:ext uri="{FF2B5EF4-FFF2-40B4-BE49-F238E27FC236}">
-                <a16:creationId xmlns:a16="http://schemas.microsoft.com/office/drawing/2014/main" id="{9346CDB5-D15A-4EFE-8E23-659A32CC9573}"/>
+                <a16:creationId xmlns:a16="http://schemas.microsoft.com/office/drawing/2014/main" id="{D21C08D3-6FB8-4825-8ABF-E05B04FF3B11}"/>
               </a:ext>
             </a:extLst>
           </p:cNvPr>
@@ -8414,7 +8414,7 @@
           <p:cNvPr id="7" name="">
             <a:extLst xmlns:a="http://schemas.openxmlformats.org/drawingml/2006/main">
               <a:ext uri="{FF2B5EF4-FFF2-40B4-BE49-F238E27FC236}">
-                <a16:creationId xmlns:a16="http://schemas.microsoft.com/office/drawing/2014/main" id="{47139B89-7C0A-40CF-BD85-E37AD62B0603}"/>
+                <a16:creationId xmlns:a16="http://schemas.microsoft.com/office/drawing/2014/main" id="{41776807-CD92-4936-93EC-076A45547D26}"/>
               </a:ext>
             </a:extLst>
           </p:cNvPr>
@@ -8494,7 +8494,7 @@
           <p:cNvPr id="8" name="">
             <a:extLst xmlns:a="http://schemas.openxmlformats.org/drawingml/2006/main">
               <a:ext uri="{FF2B5EF4-FFF2-40B4-BE49-F238E27FC236}">
-                <a16:creationId xmlns:a16="http://schemas.microsoft.com/office/drawing/2014/main" id="{DD3EA889-B690-4A8A-9A89-D47225AACFE8}"/>
+                <a16:creationId xmlns:a16="http://schemas.microsoft.com/office/drawing/2014/main" id="{9F2438EA-B014-48EF-85D8-2A5115DCF1C3}"/>
               </a:ext>
             </a:extLst>
           </p:cNvPr>
@@ -8529,7 +8529,7 @@
           <p:cNvPr id="9" name="">
             <a:extLst xmlns:a="http://schemas.openxmlformats.org/drawingml/2006/main">
               <a:ext uri="{FF2B5EF4-FFF2-40B4-BE49-F238E27FC236}">
-                <a16:creationId xmlns:a16="http://schemas.microsoft.com/office/drawing/2014/main" id="{C29BC556-8807-4A03-86E3-D2C5AC77E077}"/>
+                <a16:creationId xmlns:a16="http://schemas.microsoft.com/office/drawing/2014/main" id="{45E1508D-FF8E-463E-AD42-01F9A556DF97}"/>
               </a:ext>
             </a:extLst>
           </p:cNvPr>
@@ -8609,7 +8609,7 @@
           <p:cNvPr id="10" name="">
             <a:extLst xmlns:a="http://schemas.openxmlformats.org/drawingml/2006/main">
               <a:ext uri="{FF2B5EF4-FFF2-40B4-BE49-F238E27FC236}">
-                <a16:creationId xmlns:a16="http://schemas.microsoft.com/office/drawing/2014/main" id="{0F2714B0-315F-4711-8545-6812AE26C97E}"/>
+                <a16:creationId xmlns:a16="http://schemas.microsoft.com/office/drawing/2014/main" id="{58F2A8E4-2E1F-4F34-AD8E-61204A04275D}"/>
               </a:ext>
             </a:extLst>
           </p:cNvPr>
@@ -8644,7 +8644,7 @@
           <p:cNvPr id="11" name="">
             <a:extLst xmlns:a="http://schemas.openxmlformats.org/drawingml/2006/main">
               <a:ext uri="{FF2B5EF4-FFF2-40B4-BE49-F238E27FC236}">
-                <a16:creationId xmlns:a16="http://schemas.microsoft.com/office/drawing/2014/main" id="{7497B202-F0A5-4FA6-BC1B-9E62C36B4563}"/>
+                <a16:creationId xmlns:a16="http://schemas.microsoft.com/office/drawing/2014/main" id="{688031E2-17AB-443B-8A7C-E2737C04AFAE}"/>
               </a:ext>
             </a:extLst>
           </p:cNvPr>
@@ -8724,7 +8724,7 @@
           <p:cNvPr id="12" name="">
             <a:extLst xmlns:a="http://schemas.openxmlformats.org/drawingml/2006/main">
               <a:ext uri="{FF2B5EF4-FFF2-40B4-BE49-F238E27FC236}">
-                <a16:creationId xmlns:a16="http://schemas.microsoft.com/office/drawing/2014/main" id="{78A82874-4FC6-4A3F-8529-5682B15E902D}"/>
+                <a16:creationId xmlns:a16="http://schemas.microsoft.com/office/drawing/2014/main" id="{75BA668A-DA69-4BD4-93C3-8323FCCFB2E2}"/>
               </a:ext>
             </a:extLst>
           </p:cNvPr>
@@ -8759,7 +8759,7 @@
           <p:cNvPr id="13" name="">
             <a:extLst xmlns:a="http://schemas.openxmlformats.org/drawingml/2006/main">
               <a:ext uri="{FF2B5EF4-FFF2-40B4-BE49-F238E27FC236}">
-                <a16:creationId xmlns:a16="http://schemas.microsoft.com/office/drawing/2014/main" id="{7E6D1BEA-02BA-49DC-9139-95425DE565EC}"/>
+                <a16:creationId xmlns:a16="http://schemas.microsoft.com/office/drawing/2014/main" id="{72E02AD3-C1CA-4831-B695-4A52F78D15CE}"/>
               </a:ext>
             </a:extLst>
           </p:cNvPr>
@@ -8954,7 +8954,7 @@
           <p:cNvPr id="19" name="">
             <a:extLst xmlns:a="http://schemas.openxmlformats.org/drawingml/2006/main">
               <a:ext uri="{FF2B5EF4-FFF2-40B4-BE49-F238E27FC236}">
-                <a16:creationId xmlns:a16="http://schemas.microsoft.com/office/drawing/2014/main" id="{E53D2846-FE6F-4033-A159-28077CBBA70F}"/>
+                <a16:creationId xmlns:a16="http://schemas.microsoft.com/office/drawing/2014/main" id="{F89A5223-5DF8-41AC-825F-97F0F35D4CC6}"/>
               </a:ext>
             </a:extLst>
           </p:cNvPr>
@@ -9011,7 +9011,7 @@
           <p:cNvPr id="20" name="">
             <a:extLst xmlns:a="http://schemas.openxmlformats.org/drawingml/2006/main">
               <a:ext uri="{FF2B5EF4-FFF2-40B4-BE49-F238E27FC236}">
-                <a16:creationId xmlns:a16="http://schemas.microsoft.com/office/drawing/2014/main" id="{9E94FB51-4C1E-4C10-8091-C7BC7278344C}"/>
+                <a16:creationId xmlns:a16="http://schemas.microsoft.com/office/drawing/2014/main" id="{F75DF14A-6DC8-43A9-87C9-97176EE0E74C}"/>
               </a:ext>
             </a:extLst>
           </p:cNvPr>
@@ -9068,7 +9068,7 @@
           <p:cNvPr id="21" name="">
             <a:extLst xmlns:a="http://schemas.openxmlformats.org/drawingml/2006/main">
               <a:ext uri="{FF2B5EF4-FFF2-40B4-BE49-F238E27FC236}">
-                <a16:creationId xmlns:a16="http://schemas.microsoft.com/office/drawing/2014/main" id="{54AF6CE0-1661-4759-9699-5875BC3F325F}"/>
+                <a16:creationId xmlns:a16="http://schemas.microsoft.com/office/drawing/2014/main" id="{F5AA8E3E-D4A1-4C10-97DD-17540816F425}"/>
               </a:ext>
             </a:extLst>
           </p:cNvPr>
@@ -9123,7 +9123,7 @@
     </p:spTree>
     <p:extLst>
       <p:ext uri="{BB962C8B-B14F-4D97-AF65-F5344CB8AC3E}">
-        <p14:creationId xmlns:p14="http://schemas.microsoft.com/office/powerpoint/2010/main" val="637355008"/>
+        <p14:creationId xmlns:p14="http://schemas.microsoft.com/office/powerpoint/2010/main" val="193703233"/>
       </p:ext>
     </p:extLst>
   </p:cSld>
@@ -9154,7 +9154,7 @@
           <p:cNvPr id="23" name="">
             <a:extLst xmlns:a="http://schemas.openxmlformats.org/drawingml/2006/main">
               <a:ext uri="{FF2B5EF4-FFF2-40B4-BE49-F238E27FC236}">
-                <a16:creationId xmlns:a16="http://schemas.microsoft.com/office/drawing/2014/main" id="{3D437C37-F508-4096-8F0E-35727CB299B4}"/>
+                <a16:creationId xmlns:a16="http://schemas.microsoft.com/office/drawing/2014/main" id="{5E95F6CB-1976-4483-B014-A21B2643A2D4}"/>
               </a:ext>
             </a:extLst>
           </p:cNvPr>
@@ -9211,7 +9211,7 @@
           <p:cNvPr id="2" name="">
             <a:extLst xmlns:a="http://schemas.openxmlformats.org/drawingml/2006/main">
               <a:ext uri="{FF2B5EF4-FFF2-40B4-BE49-F238E27FC236}">
-                <a16:creationId xmlns:a16="http://schemas.microsoft.com/office/drawing/2014/main" id="{0D5B60E1-3FF2-4EF4-9110-F1761281A9C9}"/>
+                <a16:creationId xmlns:a16="http://schemas.microsoft.com/office/drawing/2014/main" id="{70351DC7-A094-4E98-885D-4B260E7225C0}"/>
               </a:ext>
             </a:extLst>
           </p:cNvPr>
@@ -9268,7 +9268,7 @@
           <p:cNvPr id="3" name="">
             <a:extLst xmlns:a="http://schemas.openxmlformats.org/drawingml/2006/main">
               <a:ext uri="{FF2B5EF4-FFF2-40B4-BE49-F238E27FC236}">
-                <a16:creationId xmlns:a16="http://schemas.microsoft.com/office/drawing/2014/main" id="{A643EA9D-0A82-4B40-998E-8C26C212D7B3}"/>
+                <a16:creationId xmlns:a16="http://schemas.microsoft.com/office/drawing/2014/main" id="{DB96B270-32BD-428F-A574-74405FFFEE55}"/>
               </a:ext>
             </a:extLst>
           </p:cNvPr>
@@ -9298,7 +9298,7 @@
           <p:cNvPr id="4" name="">
             <a:extLst xmlns:a="http://schemas.openxmlformats.org/drawingml/2006/main">
               <a:ext uri="{FF2B5EF4-FFF2-40B4-BE49-F238E27FC236}">
-                <a16:creationId xmlns:a16="http://schemas.microsoft.com/office/drawing/2014/main" id="{D9FA1711-6A83-4506-B05D-E5186408B310}"/>
+                <a16:creationId xmlns:a16="http://schemas.microsoft.com/office/drawing/2014/main" id="{BB9CB76B-2A76-46E3-8805-320DB6004146}"/>
               </a:ext>
             </a:extLst>
           </p:cNvPr>
@@ -9333,7 +9333,7 @@
           <p:cNvPr id="5" name="">
             <a:extLst xmlns:a="http://schemas.openxmlformats.org/drawingml/2006/main">
               <a:ext uri="{FF2B5EF4-FFF2-40B4-BE49-F238E27FC236}">
-                <a16:creationId xmlns:a16="http://schemas.microsoft.com/office/drawing/2014/main" id="{FAE5E751-EC75-403F-A23D-53C34244C29A}"/>
+                <a16:creationId xmlns:a16="http://schemas.microsoft.com/office/drawing/2014/main" id="{320CEED9-784C-4CBF-872D-F33DF3F75AA5}"/>
               </a:ext>
             </a:extLst>
           </p:cNvPr>
@@ -9413,7 +9413,7 @@
           <p:cNvPr id="6" name="">
             <a:extLst xmlns:a="http://schemas.openxmlformats.org/drawingml/2006/main">
               <a:ext uri="{FF2B5EF4-FFF2-40B4-BE49-F238E27FC236}">
-                <a16:creationId xmlns:a16="http://schemas.microsoft.com/office/drawing/2014/main" id="{41E51A7A-A520-434E-BCC4-C797907D8C84}"/>
+                <a16:creationId xmlns:a16="http://schemas.microsoft.com/office/drawing/2014/main" id="{65B890D6-CE2B-48B4-AB9C-D147CD12FC6A}"/>
               </a:ext>
             </a:extLst>
           </p:cNvPr>
@@ -9448,7 +9448,7 @@
           <p:cNvPr id="7" name="">
             <a:extLst xmlns:a="http://schemas.openxmlformats.org/drawingml/2006/main">
               <a:ext uri="{FF2B5EF4-FFF2-40B4-BE49-F238E27FC236}">
-                <a16:creationId xmlns:a16="http://schemas.microsoft.com/office/drawing/2014/main" id="{20158622-0039-4BD6-A594-02C354F1F113}"/>
+                <a16:creationId xmlns:a16="http://schemas.microsoft.com/office/drawing/2014/main" id="{C45994F4-2DEC-41F8-854A-5A98F96A1BFC}"/>
               </a:ext>
             </a:extLst>
           </p:cNvPr>
@@ -9528,7 +9528,7 @@
           <p:cNvPr id="8" name="">
             <a:extLst xmlns:a="http://schemas.openxmlformats.org/drawingml/2006/main">
               <a:ext uri="{FF2B5EF4-FFF2-40B4-BE49-F238E27FC236}">
-                <a16:creationId xmlns:a16="http://schemas.microsoft.com/office/drawing/2014/main" id="{05DA76CC-ED48-4BA0-B859-FBFB1A3C1E97}"/>
+                <a16:creationId xmlns:a16="http://schemas.microsoft.com/office/drawing/2014/main" id="{F9EC782D-26A7-482E-9F93-B8770E1610EB}"/>
               </a:ext>
             </a:extLst>
           </p:cNvPr>
@@ -9563,7 +9563,7 @@
           <p:cNvPr id="9" name="">
             <a:extLst xmlns:a="http://schemas.openxmlformats.org/drawingml/2006/main">
               <a:ext uri="{FF2B5EF4-FFF2-40B4-BE49-F238E27FC236}">
-                <a16:creationId xmlns:a16="http://schemas.microsoft.com/office/drawing/2014/main" id="{6341182D-CD78-4AD7-83F0-208644BE3989}"/>
+                <a16:creationId xmlns:a16="http://schemas.microsoft.com/office/drawing/2014/main" id="{2DBFE46E-99AD-4FFA-A6C3-11DB99E7AF4F}"/>
               </a:ext>
             </a:extLst>
           </p:cNvPr>
@@ -9643,7 +9643,7 @@
           <p:cNvPr id="10" name="">
             <a:extLst xmlns:a="http://schemas.openxmlformats.org/drawingml/2006/main">
               <a:ext uri="{FF2B5EF4-FFF2-40B4-BE49-F238E27FC236}">
-                <a16:creationId xmlns:a16="http://schemas.microsoft.com/office/drawing/2014/main" id="{815CCB74-044B-475B-89CE-FBD70FF2F57D}"/>
+                <a16:creationId xmlns:a16="http://schemas.microsoft.com/office/drawing/2014/main" id="{BFC8E674-FA01-4FB6-A57A-54D340D37E44}"/>
               </a:ext>
             </a:extLst>
           </p:cNvPr>
@@ -9678,7 +9678,7 @@
           <p:cNvPr id="11" name="">
             <a:extLst xmlns:a="http://schemas.openxmlformats.org/drawingml/2006/main">
               <a:ext uri="{FF2B5EF4-FFF2-40B4-BE49-F238E27FC236}">
-                <a16:creationId xmlns:a16="http://schemas.microsoft.com/office/drawing/2014/main" id="{BED46273-4D59-41E5-9DA8-B1CF99DF8778}"/>
+                <a16:creationId xmlns:a16="http://schemas.microsoft.com/office/drawing/2014/main" id="{2A37FACE-3254-48FD-8AA7-62A6CA9E31F0}"/>
               </a:ext>
             </a:extLst>
           </p:cNvPr>
@@ -9758,7 +9758,7 @@
           <p:cNvPr id="12" name="">
             <a:extLst xmlns:a="http://schemas.openxmlformats.org/drawingml/2006/main">
               <a:ext uri="{FF2B5EF4-FFF2-40B4-BE49-F238E27FC236}">
-                <a16:creationId xmlns:a16="http://schemas.microsoft.com/office/drawing/2014/main" id="{6E3883CE-6052-4A33-97B0-6A8F171DD7E8}"/>
+                <a16:creationId xmlns:a16="http://schemas.microsoft.com/office/drawing/2014/main" id="{5741F843-8BBE-4916-8849-F4C37313C463}"/>
               </a:ext>
             </a:extLst>
           </p:cNvPr>
@@ -9793,7 +9793,7 @@
           <p:cNvPr id="13" name="">
             <a:extLst xmlns:a="http://schemas.openxmlformats.org/drawingml/2006/main">
               <a:ext uri="{FF2B5EF4-FFF2-40B4-BE49-F238E27FC236}">
-                <a16:creationId xmlns:a16="http://schemas.microsoft.com/office/drawing/2014/main" id="{5BB415AD-0125-4C39-BDF2-848CB76A94A6}"/>
+                <a16:creationId xmlns:a16="http://schemas.microsoft.com/office/drawing/2014/main" id="{DA6FA59E-CFD8-466B-880B-305D611E0886}"/>
               </a:ext>
             </a:extLst>
           </p:cNvPr>
@@ -9977,7 +9977,7 @@
           <p:cNvPr id="18" name="">
             <a:extLst xmlns:a="http://schemas.openxmlformats.org/drawingml/2006/main">
               <a:ext uri="{FF2B5EF4-FFF2-40B4-BE49-F238E27FC236}">
-                <a16:creationId xmlns:a16="http://schemas.microsoft.com/office/drawing/2014/main" id="{266AA61A-EAF5-403C-A1E1-F4FFFB6DE806}"/>
+                <a16:creationId xmlns:a16="http://schemas.microsoft.com/office/drawing/2014/main" id="{92EA222B-70AB-4AAC-AAAA-AD181D912531}"/>
               </a:ext>
             </a:extLst>
           </p:cNvPr>
@@ -10034,7 +10034,7 @@
           <p:cNvPr id="19" name="">
             <a:extLst xmlns:a="http://schemas.openxmlformats.org/drawingml/2006/main">
               <a:ext uri="{FF2B5EF4-FFF2-40B4-BE49-F238E27FC236}">
-                <a16:creationId xmlns:a16="http://schemas.microsoft.com/office/drawing/2014/main" id="{A6FD852D-5C5E-4023-A9CA-FDE43D9158C9}"/>
+                <a16:creationId xmlns:a16="http://schemas.microsoft.com/office/drawing/2014/main" id="{5530F4DF-11B7-4978-AC46-46CC4968A695}"/>
               </a:ext>
             </a:extLst>
           </p:cNvPr>
@@ -10091,7 +10091,7 @@
           <p:cNvPr id="20" name="">
             <a:extLst xmlns:a="http://schemas.openxmlformats.org/drawingml/2006/main">
               <a:ext uri="{FF2B5EF4-FFF2-40B4-BE49-F238E27FC236}">
-                <a16:creationId xmlns:a16="http://schemas.microsoft.com/office/drawing/2014/main" id="{F89EDB42-180C-493C-9FFB-2C3A2A76566B}"/>
+                <a16:creationId xmlns:a16="http://schemas.microsoft.com/office/drawing/2014/main" id="{08F7E982-0D03-4F87-B4AC-75CB77FDC393}"/>
               </a:ext>
             </a:extLst>
           </p:cNvPr>
@@ -10148,7 +10148,7 @@
           <p:cNvPr id="21" name="">
             <a:extLst xmlns:a="http://schemas.openxmlformats.org/drawingml/2006/main">
               <a:ext uri="{FF2B5EF4-FFF2-40B4-BE49-F238E27FC236}">
-                <a16:creationId xmlns:a16="http://schemas.microsoft.com/office/drawing/2014/main" id="{E637CC23-50AF-4338-930A-74A96E9BC104}"/>
+                <a16:creationId xmlns:a16="http://schemas.microsoft.com/office/drawing/2014/main" id="{EA8F4269-2605-4EEA-9AE8-0AAB33811A1D}"/>
               </a:ext>
             </a:extLst>
           </p:cNvPr>
@@ -10205,7 +10205,7 @@
           <p:cNvPr id="22" name="">
             <a:extLst xmlns:a="http://schemas.openxmlformats.org/drawingml/2006/main">
               <a:ext uri="{FF2B5EF4-FFF2-40B4-BE49-F238E27FC236}">
-                <a16:creationId xmlns:a16="http://schemas.microsoft.com/office/drawing/2014/main" id="{25360792-30C2-45B6-B123-DF010FBEE115}"/>
+                <a16:creationId xmlns:a16="http://schemas.microsoft.com/office/drawing/2014/main" id="{33AE2C95-DC50-4CB7-A53E-F48F818B7829}"/>
               </a:ext>
             </a:extLst>
           </p:cNvPr>
@@ -10260,7 +10260,7 @@
     </p:spTree>
     <p:extLst>
       <p:ext uri="{BB962C8B-B14F-4D97-AF65-F5344CB8AC3E}">
-        <p14:creationId xmlns:p14="http://schemas.microsoft.com/office/powerpoint/2010/main" val="170655195"/>
+        <p14:creationId xmlns:p14="http://schemas.microsoft.com/office/powerpoint/2010/main" val="28404375"/>
       </p:ext>
     </p:extLst>
   </p:cSld>
@@ -10291,7 +10291,7 @@
           <p:cNvPr id="14" name="">
             <a:extLst xmlns:a="http://schemas.openxmlformats.org/drawingml/2006/main">
               <a:ext uri="{FF2B5EF4-FFF2-40B4-BE49-F238E27FC236}">
-                <a16:creationId xmlns:a16="http://schemas.microsoft.com/office/drawing/2014/main" id="{A64DE5AC-A920-4D82-B228-39A1B3691F99}"/>
+                <a16:creationId xmlns:a16="http://schemas.microsoft.com/office/drawing/2014/main" id="{60806A72-33CD-472F-A624-2F683017C4F4}"/>
               </a:ext>
             </a:extLst>
           </p:cNvPr>
@@ -10348,7 +10348,7 @@
           <p:cNvPr id="2" name="">
             <a:extLst xmlns:a="http://schemas.openxmlformats.org/drawingml/2006/main">
               <a:ext uri="{FF2B5EF4-FFF2-40B4-BE49-F238E27FC236}">
-                <a16:creationId xmlns:a16="http://schemas.microsoft.com/office/drawing/2014/main" id="{1F7CC6D1-1202-41BE-823E-E6EFC9268146}"/>
+                <a16:creationId xmlns:a16="http://schemas.microsoft.com/office/drawing/2014/main" id="{A8868F56-0499-4B5B-B2C2-8C7742314D2D}"/>
               </a:ext>
             </a:extLst>
           </p:cNvPr>
@@ -10405,7 +10405,7 @@
           <p:cNvPr id="3" name="">
             <a:extLst xmlns:a="http://schemas.openxmlformats.org/drawingml/2006/main">
               <a:ext uri="{FF2B5EF4-FFF2-40B4-BE49-F238E27FC236}">
-                <a16:creationId xmlns:a16="http://schemas.microsoft.com/office/drawing/2014/main" id="{C45E858A-D5ED-450C-AEC7-A004A9D091AC}"/>
+                <a16:creationId xmlns:a16="http://schemas.microsoft.com/office/drawing/2014/main" id="{5FA31DF7-1039-42C0-8A6C-B7A92FB81708}"/>
               </a:ext>
             </a:extLst>
           </p:cNvPr>
@@ -10462,7 +10462,7 @@
           <p:cNvPr id="4" name="">
             <a:extLst xmlns:a="http://schemas.openxmlformats.org/drawingml/2006/main">
               <a:ext uri="{FF2B5EF4-FFF2-40B4-BE49-F238E27FC236}">
-                <a16:creationId xmlns:a16="http://schemas.microsoft.com/office/drawing/2014/main" id="{AD2C5839-414D-4D36-BCB0-5A04511EDD42}"/>
+                <a16:creationId xmlns:a16="http://schemas.microsoft.com/office/drawing/2014/main" id="{E4332EF1-53E9-435A-8042-13765DBD0E3C}"/>
               </a:ext>
             </a:extLst>
           </p:cNvPr>
@@ -10519,7 +10519,7 @@
           <p:cNvPr id="5" name="">
             <a:extLst xmlns:a="http://schemas.openxmlformats.org/drawingml/2006/main">
               <a:ext uri="{FF2B5EF4-FFF2-40B4-BE49-F238E27FC236}">
-                <a16:creationId xmlns:a16="http://schemas.microsoft.com/office/drawing/2014/main" id="{7E461658-BEE0-410D-943F-7DE65776C5BC}"/>
+                <a16:creationId xmlns:a16="http://schemas.microsoft.com/office/drawing/2014/main" id="{3A53C76B-EE1A-44BA-A8E0-BD5589C0C13A}"/>
               </a:ext>
             </a:extLst>
           </p:cNvPr>
@@ -10576,7 +10576,7 @@
           <p:cNvPr id="6" name="">
             <a:extLst xmlns:a="http://schemas.openxmlformats.org/drawingml/2006/main">
               <a:ext uri="{FF2B5EF4-FFF2-40B4-BE49-F238E27FC236}">
-                <a16:creationId xmlns:a16="http://schemas.microsoft.com/office/drawing/2014/main" id="{E11FEC6C-14F0-4B75-B596-A0DDA96E1A46}"/>
+                <a16:creationId xmlns:a16="http://schemas.microsoft.com/office/drawing/2014/main" id="{8CF9D483-C430-4BC3-A9F7-6B95D9E1E0FA}"/>
               </a:ext>
             </a:extLst>
           </p:cNvPr>
@@ -10606,7 +10606,7 @@
           <p:cNvPr id="7" name="">
             <a:extLst xmlns:a="http://schemas.openxmlformats.org/drawingml/2006/main">
               <a:ext uri="{FF2B5EF4-FFF2-40B4-BE49-F238E27FC236}">
-                <a16:creationId xmlns:a16="http://schemas.microsoft.com/office/drawing/2014/main" id="{C0B13003-D680-4072-886F-054D81ECC95D}"/>
+                <a16:creationId xmlns:a16="http://schemas.microsoft.com/office/drawing/2014/main" id="{F46131FA-1DA5-4BE1-A0EE-AD7F0385945F}"/>
               </a:ext>
             </a:extLst>
           </p:cNvPr>
@@ -10663,7 +10663,7 @@
           <p:cNvPr id="8" name="">
             <a:extLst xmlns:a="http://schemas.openxmlformats.org/drawingml/2006/main">
               <a:ext uri="{FF2B5EF4-FFF2-40B4-BE49-F238E27FC236}">
-                <a16:creationId xmlns:a16="http://schemas.microsoft.com/office/drawing/2014/main" id="{0E80E54D-E4DE-4118-9282-F7B93825A681}"/>
+                <a16:creationId xmlns:a16="http://schemas.microsoft.com/office/drawing/2014/main" id="{E70EB1D5-E5DC-4BBE-AA96-BFEB5BF27B85}"/>
               </a:ext>
             </a:extLst>
           </p:cNvPr>
@@ -10743,7 +10743,7 @@
           <p:cNvPr id="9" name="">
             <a:extLst xmlns:a="http://schemas.openxmlformats.org/drawingml/2006/main">
               <a:ext uri="{FF2B5EF4-FFF2-40B4-BE49-F238E27FC236}">
-                <a16:creationId xmlns:a16="http://schemas.microsoft.com/office/drawing/2014/main" id="{4C87F714-8D40-44FA-83B1-9DCCE6F9AE62}"/>
+                <a16:creationId xmlns:a16="http://schemas.microsoft.com/office/drawing/2014/main" id="{C8F4F640-4BC3-4E6A-BD61-B84E75D6C866}"/>
               </a:ext>
             </a:extLst>
           </p:cNvPr>
@@ -10800,7 +10800,7 @@
           <p:cNvPr id="10" name="">
             <a:extLst xmlns:a="http://schemas.openxmlformats.org/drawingml/2006/main">
               <a:ext uri="{FF2B5EF4-FFF2-40B4-BE49-F238E27FC236}">
-                <a16:creationId xmlns:a16="http://schemas.microsoft.com/office/drawing/2014/main" id="{6B6FF29B-AED1-4965-B339-01ADDFE9EB2B}"/>
+                <a16:creationId xmlns:a16="http://schemas.microsoft.com/office/drawing/2014/main" id="{63301161-0A4B-4FC7-A502-1A9925E96674}"/>
               </a:ext>
             </a:extLst>
           </p:cNvPr>
@@ -10857,7 +10857,7 @@
           <p:cNvPr id="11" name="">
             <a:extLst xmlns:a="http://schemas.openxmlformats.org/drawingml/2006/main">
               <a:ext uri="{FF2B5EF4-FFF2-40B4-BE49-F238E27FC236}">
-                <a16:creationId xmlns:a16="http://schemas.microsoft.com/office/drawing/2014/main" id="{867E30A6-26F4-4ABA-9778-E9EAEA9EDCEB}"/>
+                <a16:creationId xmlns:a16="http://schemas.microsoft.com/office/drawing/2014/main" id="{FC43115E-0990-4EF1-AE86-D116C9873B1A}"/>
               </a:ext>
             </a:extLst>
           </p:cNvPr>
@@ -10914,7 +10914,7 @@
           <p:cNvPr id="12" name="">
             <a:extLst xmlns:a="http://schemas.openxmlformats.org/drawingml/2006/main">
               <a:ext uri="{FF2B5EF4-FFF2-40B4-BE49-F238E27FC236}">
-                <a16:creationId xmlns:a16="http://schemas.microsoft.com/office/drawing/2014/main" id="{33B4C00A-20B2-4B72-B83F-9DF8961745C7}"/>
+                <a16:creationId xmlns:a16="http://schemas.microsoft.com/office/drawing/2014/main" id="{2857E44D-3964-4127-A5A3-F40CFFB007EE}"/>
               </a:ext>
             </a:extLst>
           </p:cNvPr>
@@ -10971,7 +10971,7 @@
           <p:cNvPr id="13" name="">
             <a:extLst xmlns:a="http://schemas.openxmlformats.org/drawingml/2006/main">
               <a:ext uri="{FF2B5EF4-FFF2-40B4-BE49-F238E27FC236}">
-                <a16:creationId xmlns:a16="http://schemas.microsoft.com/office/drawing/2014/main" id="{21D1C166-3B8E-456D-B15C-295349CDF05D}"/>
+                <a16:creationId xmlns:a16="http://schemas.microsoft.com/office/drawing/2014/main" id="{5E6FC09F-92B2-45D3-9B9B-EB08D26676DF}"/>
               </a:ext>
             </a:extLst>
           </p:cNvPr>
@@ -11018,7 +11018,7 @@
                 <a:ea typeface="Arial"/>
                 <a:cs typeface="Arial"/>
               </a:rPr>
-              <a:t>All three code directories are reserved for the team's source uploads</a:t>
+              <a:t>Original, evolved, and cross-language source trees are included</a:t>
             </a:r>
           </a:p>
         </p:txBody>
@@ -11026,7 +11026,7 @@
     </p:spTree>
     <p:extLst>
       <p:ext uri="{BB962C8B-B14F-4D97-AF65-F5344CB8AC3E}">
-        <p14:creationId xmlns:p14="http://schemas.microsoft.com/office/powerpoint/2010/main" val="108746323"/>
+        <p14:creationId xmlns:p14="http://schemas.microsoft.com/office/powerpoint/2010/main" val="193024515"/>
       </p:ext>
     </p:extLst>
   </p:cSld>
@@ -11057,7 +11057,7 @@
           <p:cNvPr id="25" name="">
             <a:extLst xmlns:a="http://schemas.openxmlformats.org/drawingml/2006/main">
               <a:ext uri="{FF2B5EF4-FFF2-40B4-BE49-F238E27FC236}">
-                <a16:creationId xmlns:a16="http://schemas.microsoft.com/office/drawing/2014/main" id="{F32CD403-B771-4F43-9AB7-80C76A0737A9}"/>
+                <a16:creationId xmlns:a16="http://schemas.microsoft.com/office/drawing/2014/main" id="{CDF6E902-02F1-4089-961F-38659905696D}"/>
               </a:ext>
             </a:extLst>
           </p:cNvPr>
@@ -11114,7 +11114,7 @@
           <p:cNvPr id="2" name="">
             <a:extLst xmlns:a="http://schemas.openxmlformats.org/drawingml/2006/main">
               <a:ext uri="{FF2B5EF4-FFF2-40B4-BE49-F238E27FC236}">
-                <a16:creationId xmlns:a16="http://schemas.microsoft.com/office/drawing/2014/main" id="{AD78CDEC-94F5-467B-AB29-1E518F654210}"/>
+                <a16:creationId xmlns:a16="http://schemas.microsoft.com/office/drawing/2014/main" id="{D3297E80-83FF-42E2-A694-5FE3BE6BE9A9}"/>
               </a:ext>
             </a:extLst>
           </p:cNvPr>
@@ -11171,7 +11171,7 @@
           <p:cNvPr id="3" name="">
             <a:extLst xmlns:a="http://schemas.openxmlformats.org/drawingml/2006/main">
               <a:ext uri="{FF2B5EF4-FFF2-40B4-BE49-F238E27FC236}">
-                <a16:creationId xmlns:a16="http://schemas.microsoft.com/office/drawing/2014/main" id="{106267AA-8F4C-482E-B8DF-775620E78315}"/>
+                <a16:creationId xmlns:a16="http://schemas.microsoft.com/office/drawing/2014/main" id="{B6B4E890-8516-4051-9490-8B609075756A}"/>
               </a:ext>
             </a:extLst>
           </p:cNvPr>
@@ -11201,7 +11201,7 @@
           <p:cNvPr id="4" name="">
             <a:extLst xmlns:a="http://schemas.openxmlformats.org/drawingml/2006/main">
               <a:ext uri="{FF2B5EF4-FFF2-40B4-BE49-F238E27FC236}">
-                <a16:creationId xmlns:a16="http://schemas.microsoft.com/office/drawing/2014/main" id="{80DD322F-3739-47B6-AFB3-E6D68853D25F}"/>
+                <a16:creationId xmlns:a16="http://schemas.microsoft.com/office/drawing/2014/main" id="{F4B9D707-E7D5-4FAB-BA74-4CC675EB6283}"/>
               </a:ext>
             </a:extLst>
           </p:cNvPr>
@@ -11260,7 +11260,7 @@
           <p:cNvPr id="5" name="">
             <a:extLst xmlns:a="http://schemas.openxmlformats.org/drawingml/2006/main">
               <a:ext uri="{FF2B5EF4-FFF2-40B4-BE49-F238E27FC236}">
-                <a16:creationId xmlns:a16="http://schemas.microsoft.com/office/drawing/2014/main" id="{576B61BD-964D-4E88-8D6E-E2F3B1D87614}"/>
+                <a16:creationId xmlns:a16="http://schemas.microsoft.com/office/drawing/2014/main" id="{AECC5733-E03F-4DBB-BA4D-1A717D25FBDA}"/>
               </a:ext>
             </a:extLst>
           </p:cNvPr>
@@ -11319,7 +11319,7 @@
           <p:cNvPr id="6" name="">
             <a:extLst xmlns:a="http://schemas.openxmlformats.org/drawingml/2006/main">
               <a:ext uri="{FF2B5EF4-FFF2-40B4-BE49-F238E27FC236}">
-                <a16:creationId xmlns:a16="http://schemas.microsoft.com/office/drawing/2014/main" id="{FF9FE116-84A9-4DF0-A834-FC93D3B55C40}"/>
+                <a16:creationId xmlns:a16="http://schemas.microsoft.com/office/drawing/2014/main" id="{37BAD7BF-2DB2-427D-B303-BA853142E0DE}"/>
               </a:ext>
             </a:extLst>
           </p:cNvPr>
@@ -11378,7 +11378,7 @@
           <p:cNvPr id="7" name="">
             <a:extLst xmlns:a="http://schemas.openxmlformats.org/drawingml/2006/main">
               <a:ext uri="{FF2B5EF4-FFF2-40B4-BE49-F238E27FC236}">
-                <a16:creationId xmlns:a16="http://schemas.microsoft.com/office/drawing/2014/main" id="{2E4A96CD-24B6-489C-9190-A9DCAAA11EA1}"/>
+                <a16:creationId xmlns:a16="http://schemas.microsoft.com/office/drawing/2014/main" id="{F1B5FA76-6998-47E4-A171-AF47CC7B67CC}"/>
               </a:ext>
             </a:extLst>
           </p:cNvPr>
@@ -11437,7 +11437,7 @@
           <p:cNvPr id="8" name="">
             <a:extLst xmlns:a="http://schemas.openxmlformats.org/drawingml/2006/main">
               <a:ext uri="{FF2B5EF4-FFF2-40B4-BE49-F238E27FC236}">
-                <a16:creationId xmlns:a16="http://schemas.microsoft.com/office/drawing/2014/main" id="{922B7DA2-B432-4337-9B6E-6C5368D7BB6F}"/>
+                <a16:creationId xmlns:a16="http://schemas.microsoft.com/office/drawing/2014/main" id="{4CCAF59E-5AD9-47BA-A754-39D2B953EBEA}"/>
               </a:ext>
             </a:extLst>
           </p:cNvPr>
@@ -11496,7 +11496,7 @@
           <p:cNvPr id="9" name="">
             <a:extLst xmlns:a="http://schemas.openxmlformats.org/drawingml/2006/main">
               <a:ext uri="{FF2B5EF4-FFF2-40B4-BE49-F238E27FC236}">
-                <a16:creationId xmlns:a16="http://schemas.microsoft.com/office/drawing/2014/main" id="{E9E45DAA-6C6F-482B-8B86-B027FB8F193F}"/>
+                <a16:creationId xmlns:a16="http://schemas.microsoft.com/office/drawing/2014/main" id="{E575D868-B8C7-4687-BF10-2442F89B79A3}"/>
               </a:ext>
             </a:extLst>
           </p:cNvPr>
@@ -11583,7 +11583,7 @@
           <p:cNvPr id="10" name="">
             <a:extLst xmlns:a="http://schemas.openxmlformats.org/drawingml/2006/main">
               <a:ext uri="{FF2B5EF4-FFF2-40B4-BE49-F238E27FC236}">
-                <a16:creationId xmlns:a16="http://schemas.microsoft.com/office/drawing/2014/main" id="{B7B55890-3F98-456B-9C0A-D80E4789ED47}"/>
+                <a16:creationId xmlns:a16="http://schemas.microsoft.com/office/drawing/2014/main" id="{E393B59E-218A-4CA9-9003-5C6A0965006A}"/>
               </a:ext>
             </a:extLst>
           </p:cNvPr>
@@ -11670,7 +11670,7 @@
           <p:cNvPr id="11" name="">
             <a:extLst xmlns:a="http://schemas.openxmlformats.org/drawingml/2006/main">
               <a:ext uri="{FF2B5EF4-FFF2-40B4-BE49-F238E27FC236}">
-                <a16:creationId xmlns:a16="http://schemas.microsoft.com/office/drawing/2014/main" id="{78FCDDED-959E-4E20-9785-EA54CFC77AAB}"/>
+                <a16:creationId xmlns:a16="http://schemas.microsoft.com/office/drawing/2014/main" id="{E5411786-C532-4CDD-A73F-24D04F3BF0E2}"/>
               </a:ext>
             </a:extLst>
           </p:cNvPr>
@@ -11757,7 +11757,7 @@
           <p:cNvPr id="12" name="">
             <a:extLst xmlns:a="http://schemas.openxmlformats.org/drawingml/2006/main">
               <a:ext uri="{FF2B5EF4-FFF2-40B4-BE49-F238E27FC236}">
-                <a16:creationId xmlns:a16="http://schemas.microsoft.com/office/drawing/2014/main" id="{BB77EE83-8274-4CB0-86AD-18C4A8A2C58F}"/>
+                <a16:creationId xmlns:a16="http://schemas.microsoft.com/office/drawing/2014/main" id="{C9980D90-0832-43A3-A8FB-89A63C77C5B6}"/>
               </a:ext>
             </a:extLst>
           </p:cNvPr>
@@ -11844,7 +11844,7 @@
           <p:cNvPr id="13" name="">
             <a:extLst xmlns:a="http://schemas.openxmlformats.org/drawingml/2006/main">
               <a:ext uri="{FF2B5EF4-FFF2-40B4-BE49-F238E27FC236}">
-                <a16:creationId xmlns:a16="http://schemas.microsoft.com/office/drawing/2014/main" id="{A45CC264-61DE-43A5-A4B3-43172C024406}"/>
+                <a16:creationId xmlns:a16="http://schemas.microsoft.com/office/drawing/2014/main" id="{FD4E2D1C-EFAC-4039-8585-1DB287D6C21F}"/>
               </a:ext>
             </a:extLst>
           </p:cNvPr>
@@ -11931,7 +11931,7 @@
           <p:cNvPr id="14" name="">
             <a:extLst xmlns:a="http://schemas.openxmlformats.org/drawingml/2006/main">
               <a:ext uri="{FF2B5EF4-FFF2-40B4-BE49-F238E27FC236}">
-                <a16:creationId xmlns:a16="http://schemas.microsoft.com/office/drawing/2014/main" id="{170C05C7-118F-41E0-BCF7-892468C3D0B7}"/>
+                <a16:creationId xmlns:a16="http://schemas.microsoft.com/office/drawing/2014/main" id="{40E5D85A-23F6-4401-AEF3-236B9FF395E3}"/>
               </a:ext>
             </a:extLst>
           </p:cNvPr>
@@ -12018,7 +12018,7 @@
           <p:cNvPr id="15" name="">
             <a:extLst xmlns:a="http://schemas.openxmlformats.org/drawingml/2006/main">
               <a:ext uri="{FF2B5EF4-FFF2-40B4-BE49-F238E27FC236}">
-                <a16:creationId xmlns:a16="http://schemas.microsoft.com/office/drawing/2014/main" id="{AA447BF0-36C3-4DA6-BFE3-D52655D6361D}"/>
+                <a16:creationId xmlns:a16="http://schemas.microsoft.com/office/drawing/2014/main" id="{31BF9704-A5F6-430F-A175-146320A2836C}"/>
               </a:ext>
             </a:extLst>
           </p:cNvPr>
@@ -12105,7 +12105,7 @@
           <p:cNvPr id="16" name="">
             <a:extLst xmlns:a="http://schemas.openxmlformats.org/drawingml/2006/main">
               <a:ext uri="{FF2B5EF4-FFF2-40B4-BE49-F238E27FC236}">
-                <a16:creationId xmlns:a16="http://schemas.microsoft.com/office/drawing/2014/main" id="{1AF5A5D9-D6F2-4789-9174-6AAC8ECE53C8}"/>
+                <a16:creationId xmlns:a16="http://schemas.microsoft.com/office/drawing/2014/main" id="{4DF729C9-4AA5-4112-94CD-A1E1E54B2AE8}"/>
               </a:ext>
             </a:extLst>
           </p:cNvPr>
@@ -12192,7 +12192,7 @@
           <p:cNvPr id="17" name="">
             <a:extLst xmlns:a="http://schemas.openxmlformats.org/drawingml/2006/main">
               <a:ext uri="{FF2B5EF4-FFF2-40B4-BE49-F238E27FC236}">
-                <a16:creationId xmlns:a16="http://schemas.microsoft.com/office/drawing/2014/main" id="{0DEB71C1-6192-4B63-8E69-4DCFCA86C4C2}"/>
+                <a16:creationId xmlns:a16="http://schemas.microsoft.com/office/drawing/2014/main" id="{AE4034E6-A53D-48C2-8B67-0D659DD2FCB7}"/>
               </a:ext>
             </a:extLst>
           </p:cNvPr>
@@ -12279,7 +12279,7 @@
           <p:cNvPr id="18" name="">
             <a:extLst xmlns:a="http://schemas.openxmlformats.org/drawingml/2006/main">
               <a:ext uri="{FF2B5EF4-FFF2-40B4-BE49-F238E27FC236}">
-                <a16:creationId xmlns:a16="http://schemas.microsoft.com/office/drawing/2014/main" id="{E73FA114-B4BB-45A7-9C49-777CD69FFC44}"/>
+                <a16:creationId xmlns:a16="http://schemas.microsoft.com/office/drawing/2014/main" id="{29122410-4096-48A8-AB9A-1611EF8FBC4E}"/>
               </a:ext>
             </a:extLst>
           </p:cNvPr>
@@ -12366,7 +12366,7 @@
           <p:cNvPr id="19" name="">
             <a:extLst xmlns:a="http://schemas.openxmlformats.org/drawingml/2006/main">
               <a:ext uri="{FF2B5EF4-FFF2-40B4-BE49-F238E27FC236}">
-                <a16:creationId xmlns:a16="http://schemas.microsoft.com/office/drawing/2014/main" id="{325A6B44-A894-44A2-B554-5154715BEDF7}"/>
+                <a16:creationId xmlns:a16="http://schemas.microsoft.com/office/drawing/2014/main" id="{A2F91790-87EC-4951-BA8A-7EC224D3A53A}"/>
               </a:ext>
             </a:extLst>
           </p:cNvPr>
@@ -12423,7 +12423,7 @@
           <p:cNvPr id="20" name="">
             <a:extLst xmlns:a="http://schemas.openxmlformats.org/drawingml/2006/main">
               <a:ext uri="{FF2B5EF4-FFF2-40B4-BE49-F238E27FC236}">
-                <a16:creationId xmlns:a16="http://schemas.microsoft.com/office/drawing/2014/main" id="{D48EAF94-F11C-4FF6-B2DB-1E903482F729}"/>
+                <a16:creationId xmlns:a16="http://schemas.microsoft.com/office/drawing/2014/main" id="{B3D2CFF8-A522-49ED-BABA-6381F2D105FD}"/>
               </a:ext>
             </a:extLst>
           </p:cNvPr>
@@ -12480,7 +12480,7 @@
           <p:cNvPr id="21" name="">
             <a:extLst xmlns:a="http://schemas.openxmlformats.org/drawingml/2006/main">
               <a:ext uri="{FF2B5EF4-FFF2-40B4-BE49-F238E27FC236}">
-                <a16:creationId xmlns:a16="http://schemas.microsoft.com/office/drawing/2014/main" id="{B324EE76-6597-460E-8268-FA6DC9183023}"/>
+                <a16:creationId xmlns:a16="http://schemas.microsoft.com/office/drawing/2014/main" id="{254C7309-2A35-4C2C-A7D5-A57458728999}"/>
               </a:ext>
             </a:extLst>
           </p:cNvPr>
@@ -12527,7 +12527,7 @@
                 <a:ea typeface="Arial"/>
                 <a:cs typeface="Arial"/>
               </a:rPr>
-              <a:t>Team-confirmed</a:t>
+              <a:t>Terminal evidence</a:t>
             </a:r>
           </a:p>
         </p:txBody>
@@ -12537,7 +12537,7 @@
           <p:cNvPr id="22" name="">
             <a:extLst xmlns:a="http://schemas.openxmlformats.org/drawingml/2006/main">
               <a:ext uri="{FF2B5EF4-FFF2-40B4-BE49-F238E27FC236}">
-                <a16:creationId xmlns:a16="http://schemas.microsoft.com/office/drawing/2014/main" id="{CB1F4A19-07DD-4F37-91F8-560114073EF5}"/>
+                <a16:creationId xmlns:a16="http://schemas.microsoft.com/office/drawing/2014/main" id="{981D5189-7F1C-46F8-A130-FFD8006AAE78}"/>
               </a:ext>
             </a:extLst>
           </p:cNvPr>
@@ -12549,7 +12549,7 @@
         <p:spPr>
           <a:xfrm xmlns:a="http://schemas.openxmlformats.org/drawingml/2006/main">
             <a:off x="2714625" y="5505450"/>
-            <a:ext cx="7239000" cy="400050"/>
+            <a:ext cx="7620000" cy="400050"/>
           </a:xfrm>
           <a:prstGeom xmlns:a="http://schemas.openxmlformats.org/drawingml/2006/main" prst="rect">
             <a:avLst/>
@@ -12584,7 +12584,7 @@
                 <a:ea typeface="Arial"/>
                 <a:cs typeface="Arial"/>
               </a:rPr>
-              <a:t>Java and C++ passes; compiler timing was unavailable in this workspace</a:t>
+              <a:t>Java and C++ passes are documented; compiler timing was unavailable in this workspace</a:t>
             </a:r>
           </a:p>
         </p:txBody>
@@ -12594,7 +12594,7 @@
           <p:cNvPr id="23" name="">
             <a:extLst xmlns:a="http://schemas.openxmlformats.org/drawingml/2006/main">
               <a:ext uri="{FF2B5EF4-FFF2-40B4-BE49-F238E27FC236}">
-                <a16:creationId xmlns:a16="http://schemas.microsoft.com/office/drawing/2014/main" id="{459F0CE4-FAED-4285-A825-D30DE6A3ED92}"/>
+                <a16:creationId xmlns:a16="http://schemas.microsoft.com/office/drawing/2014/main" id="{50BDD7E8-0817-4CC1-8144-AB5678504494}"/>
               </a:ext>
             </a:extLst>
           </p:cNvPr>
@@ -12651,7 +12651,7 @@
           <p:cNvPr id="24" name="">
             <a:extLst xmlns:a="http://schemas.openxmlformats.org/drawingml/2006/main">
               <a:ext uri="{FF2B5EF4-FFF2-40B4-BE49-F238E27FC236}">
-                <a16:creationId xmlns:a16="http://schemas.microsoft.com/office/drawing/2014/main" id="{73DB93EA-F7AA-4E28-A0B3-1DCC33AC4BAF}"/>
+                <a16:creationId xmlns:a16="http://schemas.microsoft.com/office/drawing/2014/main" id="{27B20F3F-E0D1-4ACB-9A67-A46955ADE294}"/>
               </a:ext>
             </a:extLst>
           </p:cNvPr>
@@ -12706,7 +12706,7 @@
     </p:spTree>
     <p:extLst>
       <p:ext uri="{BB962C8B-B14F-4D97-AF65-F5344CB8AC3E}">
-        <p14:creationId xmlns:p14="http://schemas.microsoft.com/office/powerpoint/2010/main" val="826184314"/>
+        <p14:creationId xmlns:p14="http://schemas.microsoft.com/office/powerpoint/2010/main" val="195260675"/>
       </p:ext>
     </p:extLst>
   </p:cSld>
